--- a/tutor-time/movement-and-mental-health/downloads/Movement_and_Mental_Health_Lesson_3.pptx
+++ b/tutor-time/movement-and-mental-health/downloads/Movement_and_Mental_Health_Lesson_3.pptx
@@ -4513,7 +4513,7 @@
                 </a:solidFill>
                 <a:latin typeface="Karla"/>
               </a:rPr>
-              <a:t>THE BIT THAT ACTUALLY PREDICTS IT</a:t>
+              <a:t>THE BIT THAT MAKES IT LAST</a:t>
             </a:r>
           </a:p>
         </p:txBody>
@@ -6811,7 +6811,7 @@
                 </a:solidFill>
                 <a:latin typeface="Karla"/>
               </a:rPr>
-              <a:t>FIND YOUR SHEET FROM THREE WEEKS AGO</a:t>
+              <a:t>FIND YOUR SHEET FROM LESSON ONE</a:t>
             </a:r>
           </a:p>
         </p:txBody>
@@ -7553,7 +7553,7 @@
                 </a:solidFill>
                 <a:latin typeface="Karla"/>
               </a:rPr>
-              <a:t>Three weeks ago you guessed. Then you measured. Now you have a plan.</a:t>
+              <a:t>In lesson one you guessed. Then you measured. Now you have a plan.</a:t>
             </a:r>
           </a:p>
         </p:txBody>
@@ -7765,7 +7765,7 @@
                 </a:solidFill>
                 <a:latin typeface="Karla"/>
               </a:rPr>
-              <a:t>ON THE SLIP, THEN KEEP IT</a:t>
+              <a:t>ON THE BACK OF YOUR LESSON SHEET</a:t>
             </a:r>
           </a:p>
         </p:txBody>
@@ -8375,7 +8375,7 @@
                 </a:solidFill>
                 <a:latin typeface="Karla"/>
               </a:rPr>
-              <a:t>A day with no time attached is a wish, not a plan. Write down the thing it comes after.</a:t>
+              <a:t>A day with nothing attached is a wish, not a plan. Write down the thing it comes after.</a:t>
             </a:r>
           </a:p>
         </p:txBody>
@@ -9407,7 +9407,7 @@
                 </a:solidFill>
                 <a:latin typeface="Libre Caslon Display"/>
               </a:rPr>
-              <a:t>Read this one first</a:t>
+              <a:t>Before they start</a:t>
             </a:r>
           </a:p>
         </p:txBody>
@@ -9885,7 +9885,7 @@
                 </a:solidFill>
                 <a:latin typeface="Karla"/>
               </a:rPr>
-              <a:t>Spare cards cover almost every version of this. Nobody leaves without a plan.</a:t>
+              <a:t>Have spare cards ready. Nobody leaves without a plan.</a:t>
             </a:r>
           </a:p>
         </p:txBody>
@@ -10359,7 +10359,7 @@
                 </a:solidFill>
                 <a:latin typeface="Karla"/>
               </a:rPr>
-              <a:t>Almost everybody's pulse went up and most people's focus did too.</a:t>
+              <a:t>Almost everybody’s pulse went up and most people’s focus did too.</a:t>
             </a:r>
           </a:p>
         </p:txBody>
@@ -15923,7 +15923,7 @@
                 </a:solidFill>
                 <a:latin typeface="Karla"/>
               </a:rPr>
-              <a:t>Name the real obstacle. You need it for the next slide.</a:t>
+              <a:t>Name the real obstacle. You need it for the if-then sentence.</a:t>
             </a:r>
           </a:p>
         </p:txBody>

--- a/tutor-time/movement-and-mental-health/downloads/Movement_and_Mental_Health_Lesson_3.pptx
+++ b/tutor-time/movement-and-mental-health/downloads/Movement_and_Mental_Health_Lesson_3.pptx
@@ -3207,7 +3207,7 @@
                 <a:solidFill>
                   <a:srgbClr val="502961"/>
                 </a:solidFill>
-                <a:latin typeface="Karla"/>
+                <a:latin typeface="Calibri"/>
               </a:rPr>
               <a:t>MOVEMENT AND MENTAL HEALTH  ·  LESSON 3 OF 3</a:t>
             </a:r>
@@ -3245,11 +3245,11 @@
               </a:spcAft>
             </a:pPr>
             <a:r>
-              <a:rPr sz="3400" b="1" i="0">
+              <a:rPr sz="3400" b="0" i="0">
                 <a:solidFill>
                   <a:srgbClr val="502961"/>
                 </a:solidFill>
-                <a:latin typeface="Libre Caslon Display"/>
+                <a:latin typeface="Georgia"/>
               </a:rPr>
               <a:t>The one you would actually do</a:t>
             </a:r>
@@ -3335,7 +3335,7 @@
                 <a:solidFill>
                   <a:srgbClr val="635C6B"/>
                 </a:solidFill>
-                <a:latin typeface="Karla"/>
+                <a:latin typeface="Calibri"/>
               </a:rPr>
               <a:t>Anyone can write a plan that would work.</a:t>
             </a:r>
@@ -3345,7 +3345,7 @@
                 <a:solidFill>
                   <a:srgbClr val="635C6B"/>
                 </a:solidFill>
-                <a:latin typeface="Karla"/>
+                <a:latin typeface="Calibri"/>
               </a:rPr>
               <a:t>The hard part is writing one you are still doing in four weeks.</a:t>
             </a:r>
@@ -3387,7 +3387,7 @@
                 <a:solidFill>
                   <a:srgbClr val="9C95A3"/>
                 </a:solidFill>
-                <a:latin typeface="Karla"/>
+                <a:latin typeface="Calibri"/>
               </a:rPr>
               <a:t>Healthy Body, Healthy Mind</a:t>
             </a:r>
@@ -3453,7 +3453,7 @@
                 <a:solidFill>
                   <a:srgbClr val="9C95A3"/>
                 </a:solidFill>
-                <a:latin typeface="Karla"/>
+                <a:latin typeface="Calibri"/>
               </a:rPr>
               <a:t>The Pastoral Guide</a:t>
             </a:r>
@@ -3495,7 +3495,7 @@
                 <a:solidFill>
                   <a:srgbClr val="9C95A3"/>
                 </a:solidFill>
-                <a:latin typeface="Karla"/>
+                <a:latin typeface="Calibri"/>
               </a:rPr>
               <a:t>1 / 17</a:t>
             </a:r>
@@ -3599,97 +3599,9 @@
                 <a:solidFill>
                   <a:srgbClr val="502961"/>
                 </a:solidFill>
-                <a:latin typeface="Karla"/>
+                <a:latin typeface="Calibri"/>
               </a:rPr>
               <a:t>CARDS BACK TO THEIR OWNERS</a:t>
-            </a:r>
-          </a:p>
-        </p:txBody>
-      </p:sp>
-      <p:sp>
-        <p:nvSpPr>
-          <p:cNvPr id="4" name="Rounded Rectangle 3"/>
-          <p:cNvSpPr/>
-          <p:nvPr/>
-        </p:nvSpPr>
-        <p:spPr>
-          <a:xfrm>
-            <a:off x="7086600" y="530352"/>
-            <a:ext cx="1371600" cy="347472"/>
-          </a:xfrm>
-          <a:prstGeom prst="roundRect">
-            <a:avLst>
-              <a:gd name="adj" fmla="val 50000"/>
-            </a:avLst>
-          </a:prstGeom>
-          <a:solidFill>
-            <a:srgbClr val="F0E4F5"/>
-          </a:solidFill>
-          <a:ln>
-            <a:noFill/>
-          </a:ln>
-          <a:effectLst/>
-        </p:spPr>
-        <p:style>
-          <a:lnRef idx="1">
-            <a:schemeClr val="accent1"/>
-          </a:lnRef>
-          <a:fillRef idx="3">
-            <a:schemeClr val="accent1"/>
-          </a:fillRef>
-          <a:effectRef idx="2">
-            <a:schemeClr val="accent1"/>
-          </a:effectRef>
-          <a:fontRef idx="minor">
-            <a:schemeClr val="lt1"/>
-          </a:fontRef>
-        </p:style>
-        <p:txBody>
-          <a:bodyPr rtlCol="0" anchor="ctr"/>
-          <a:lstStyle/>
-          <a:p>
-            <a:pPr algn="ctr"/>
-          </a:p>
-        </p:txBody>
-      </p:sp>
-      <p:sp>
-        <p:nvSpPr>
-          <p:cNvPr id="5" name="TextBox 4"/>
-          <p:cNvSpPr txBox="1"/>
-          <p:nvPr/>
-        </p:nvSpPr>
-        <p:spPr>
-          <a:xfrm>
-            <a:off x="7086600" y="589788"/>
-            <a:ext cx="1371600" cy="237744"/>
-          </a:xfrm>
-          <a:prstGeom prst="rect">
-            <a:avLst/>
-          </a:prstGeom>
-          <a:noFill/>
-        </p:spPr>
-        <p:txBody>
-          <a:bodyPr wrap="square" lIns="0" rIns="0" tIns="0" bIns="0" anchor="t">
-            <a:spAutoFit/>
-          </a:bodyPr>
-          <a:lstStyle/>
-          <a:p>
-            <a:pPr algn="ctr">
-              <a:lnSpc>
-                <a:spcPct val="125000"/>
-              </a:lnSpc>
-              <a:spcAft>
-                <a:spcPts val="0"/>
-              </a:spcAft>
-            </a:pPr>
-            <a:r>
-              <a:rPr sz="1000" b="1" i="0" spc="100">
-                <a:solidFill>
-                  <a:srgbClr val="502961"/>
-                </a:solidFill>
-                <a:latin typeface="Karla"/>
-              </a:rPr>
-              <a:t>READ IT</a:t>
             </a:r>
           </a:p>
         </p:txBody>
@@ -3725,11 +3637,11 @@
               </a:spcAft>
             </a:pPr>
             <a:r>
-              <a:rPr sz="3200" b="1" i="0">
+              <a:rPr sz="3200" b="0" i="0">
                 <a:solidFill>
                   <a:srgbClr val="2F2A36"/>
                 </a:solidFill>
-                <a:latin typeface="Libre Caslon Display"/>
+                <a:latin typeface="Georgia"/>
               </a:rPr>
               <a:t>What did they spot?</a:t>
             </a:r>
@@ -3859,11 +3771,11 @@
               </a:spcAft>
             </a:pPr>
             <a:r>
-              <a:rPr sz="1200" b="1" i="0">
+              <a:rPr sz="1200" b="0" i="0">
                 <a:solidFill>
                   <a:srgbClr val="FFFDF7"/>
                 </a:solidFill>
-                <a:latin typeface="Libre Caslon Display"/>
+                <a:latin typeface="Georgia"/>
               </a:rPr>
               <a:t>1</a:t>
             </a:r>
@@ -3905,7 +3817,7 @@
                 <a:solidFill>
                   <a:srgbClr val="2F2A36"/>
                 </a:solidFill>
-                <a:latin typeface="Karla"/>
+                <a:latin typeface="Calibri"/>
               </a:rPr>
               <a:t>Which test did most plans fail? There is almost always one.</a:t>
             </a:r>
@@ -4035,11 +3947,11 @@
               </a:spcAft>
             </a:pPr>
             <a:r>
-              <a:rPr sz="1200" b="1" i="0">
+              <a:rPr sz="1200" b="0" i="0">
                 <a:solidFill>
                   <a:srgbClr val="FFFDF7"/>
                 </a:solidFill>
-                <a:latin typeface="Libre Caslon Display"/>
+                <a:latin typeface="Georgia"/>
               </a:rPr>
               <a:t>2</a:t>
             </a:r>
@@ -4081,7 +3993,7 @@
                 <a:solidFill>
                   <a:srgbClr val="2F2A36"/>
                 </a:solidFill>
-                <a:latin typeface="Karla"/>
+                <a:latin typeface="Calibri"/>
               </a:rPr>
               <a:t>Did anybody pass all four without making it trivial? What was it?</a:t>
             </a:r>
@@ -4211,11 +4123,11 @@
               </a:spcAft>
             </a:pPr>
             <a:r>
-              <a:rPr sz="1200" b="1" i="0">
+              <a:rPr sz="1200" b="0" i="0">
                 <a:solidFill>
                   <a:srgbClr val="FFFDF7"/>
                 </a:solidFill>
-                <a:latin typeface="Libre Caslon Display"/>
+                <a:latin typeface="Georgia"/>
               </a:rPr>
               <a:t>3</a:t>
             </a:r>
@@ -4257,7 +4169,7 @@
                 <a:solidFill>
                   <a:srgbClr val="2F2A36"/>
                 </a:solidFill>
-                <a:latin typeface="Karla"/>
+                <a:latin typeface="Calibri"/>
               </a:rPr>
               <a:t>Whose change are you actually going to take?</a:t>
             </a:r>
@@ -4299,7 +4211,7 @@
                 <a:solidFill>
                   <a:srgbClr val="502961"/>
                 </a:solidFill>
-                <a:latin typeface="Karla"/>
+                <a:latin typeface="Calibri"/>
               </a:rPr>
               <a:t>It is nearly always the first test. Almost everybody writes a week one that is too big.</a:t>
             </a:r>
@@ -4365,7 +4277,7 @@
                 <a:solidFill>
                   <a:srgbClr val="9C95A3"/>
                 </a:solidFill>
-                <a:latin typeface="Karla"/>
+                <a:latin typeface="Calibri"/>
               </a:rPr>
               <a:t>The Pastoral Guide</a:t>
             </a:r>
@@ -4407,7 +4319,7 @@
                 <a:solidFill>
                   <a:srgbClr val="9C95A3"/>
                 </a:solidFill>
-                <a:latin typeface="Karla"/>
+                <a:latin typeface="Calibri"/>
               </a:rPr>
               <a:t>10 / 17</a:t>
             </a:r>
@@ -4511,97 +4423,9 @@
                 <a:solidFill>
                   <a:srgbClr val="502961"/>
                 </a:solidFill>
-                <a:latin typeface="Karla"/>
+                <a:latin typeface="Calibri"/>
               </a:rPr>
               <a:t>THE BIT THAT MAKES IT LAST</a:t>
-            </a:r>
-          </a:p>
-        </p:txBody>
-      </p:sp>
-      <p:sp>
-        <p:nvSpPr>
-          <p:cNvPr id="4" name="Rounded Rectangle 3"/>
-          <p:cNvSpPr/>
-          <p:nvPr/>
-        </p:nvSpPr>
-        <p:spPr>
-          <a:xfrm>
-            <a:off x="7086600" y="530352"/>
-            <a:ext cx="1371600" cy="347472"/>
-          </a:xfrm>
-          <a:prstGeom prst="roundRect">
-            <a:avLst>
-              <a:gd name="adj" fmla="val 50000"/>
-            </a:avLst>
-          </a:prstGeom>
-          <a:solidFill>
-            <a:srgbClr val="F0E4F5"/>
-          </a:solidFill>
-          <a:ln>
-            <a:noFill/>
-          </a:ln>
-          <a:effectLst/>
-        </p:spPr>
-        <p:style>
-          <a:lnRef idx="1">
-            <a:schemeClr val="accent1"/>
-          </a:lnRef>
-          <a:fillRef idx="3">
-            <a:schemeClr val="accent1"/>
-          </a:fillRef>
-          <a:effectRef idx="2">
-            <a:schemeClr val="accent1"/>
-          </a:effectRef>
-          <a:fontRef idx="minor">
-            <a:schemeClr val="lt1"/>
-          </a:fontRef>
-        </p:style>
-        <p:txBody>
-          <a:bodyPr rtlCol="0" anchor="ctr"/>
-          <a:lstStyle/>
-          <a:p>
-            <a:pPr algn="ctr"/>
-          </a:p>
-        </p:txBody>
-      </p:sp>
-      <p:sp>
-        <p:nvSpPr>
-          <p:cNvPr id="5" name="TextBox 4"/>
-          <p:cNvSpPr txBox="1"/>
-          <p:nvPr/>
-        </p:nvSpPr>
-        <p:spPr>
-          <a:xfrm>
-            <a:off x="7086600" y="589788"/>
-            <a:ext cx="1371600" cy="237744"/>
-          </a:xfrm>
-          <a:prstGeom prst="rect">
-            <a:avLst/>
-          </a:prstGeom>
-          <a:noFill/>
-        </p:spPr>
-        <p:txBody>
-          <a:bodyPr wrap="square" lIns="0" rIns="0" tIns="0" bIns="0" anchor="t">
-            <a:spAutoFit/>
-          </a:bodyPr>
-          <a:lstStyle/>
-          <a:p>
-            <a:pPr algn="ctr">
-              <a:lnSpc>
-                <a:spcPct val="125000"/>
-              </a:lnSpc>
-              <a:spcAft>
-                <a:spcPts val="0"/>
-              </a:spcAft>
-            </a:pPr>
-            <a:r>
-              <a:rPr sz="1000" b="1" i="0" spc="100">
-                <a:solidFill>
-                  <a:srgbClr val="502961"/>
-                </a:solidFill>
-                <a:latin typeface="Karla"/>
-              </a:rPr>
-              <a:t>LEARN</a:t>
             </a:r>
           </a:p>
         </p:txBody>
@@ -4637,11 +4461,11 @@
               </a:spcAft>
             </a:pPr>
             <a:r>
-              <a:rPr sz="3400" b="1" i="0">
+              <a:rPr sz="3400" b="0" i="0">
                 <a:solidFill>
                   <a:srgbClr val="2F2A36"/>
                 </a:solidFill>
-                <a:latin typeface="Libre Caslon Display"/>
+                <a:latin typeface="Georgia"/>
               </a:rPr>
               <a:t>If, then</a:t>
             </a:r>
@@ -4683,7 +4507,7 @@
                 <a:solidFill>
                   <a:srgbClr val="635C6B"/>
                 </a:solidFill>
-                <a:latin typeface="Karla"/>
+                <a:latin typeface="Calibri"/>
               </a:rPr>
               <a:t>Deciding in advance what you will do when it goes wrong beats deciding on the day.</a:t>
             </a:r>
@@ -4769,11 +4593,11 @@
               </a:spcAft>
             </a:pPr>
             <a:r>
-              <a:rPr sz="1250" b="1" i="0">
+              <a:rPr sz="1250" b="0" i="0">
                 <a:solidFill>
                   <a:srgbClr val="502961"/>
                 </a:solidFill>
-                <a:latin typeface="Libre Caslon Display"/>
+                <a:latin typeface="Georgia"/>
               </a:rPr>
               <a:t>If I get home late,</a:t>
             </a:r>
@@ -4815,7 +4639,7 @@
                 <a:solidFill>
                   <a:srgbClr val="635C6B"/>
                 </a:solidFill>
-                <a:latin typeface="Karla"/>
+                <a:latin typeface="Calibri"/>
               </a:rPr>
               <a:t>then I do the two-minute version, not none of it.</a:t>
             </a:r>
@@ -4901,11 +4725,11 @@
               </a:spcAft>
             </a:pPr>
             <a:r>
-              <a:rPr sz="1250" b="1" i="0">
+              <a:rPr sz="1250" b="0" i="0">
                 <a:solidFill>
                   <a:srgbClr val="502961"/>
                 </a:solidFill>
-                <a:latin typeface="Libre Caslon Display"/>
+                <a:latin typeface="Georgia"/>
               </a:rPr>
               <a:t>If I cannot face it,</a:t>
             </a:r>
@@ -4947,7 +4771,7 @@
                 <a:solidFill>
                   <a:srgbClr val="635C6B"/>
                 </a:solidFill>
-                <a:latin typeface="Karla"/>
+                <a:latin typeface="Calibri"/>
               </a:rPr>
               <a:t>then I do the first thirty seconds and stop if I want to.</a:t>
             </a:r>
@@ -5033,11 +4857,11 @@
               </a:spcAft>
             </a:pPr>
             <a:r>
-              <a:rPr sz="1250" b="1" i="0">
+              <a:rPr sz="1250" b="0" i="0">
                 <a:solidFill>
                   <a:srgbClr val="502961"/>
                 </a:solidFill>
-                <a:latin typeface="Libre Caslon Display"/>
+                <a:latin typeface="Georgia"/>
               </a:rPr>
               <a:t>If I miss a day,</a:t>
             </a:r>
@@ -5079,7 +4903,7 @@
                 <a:solidFill>
                   <a:srgbClr val="635C6B"/>
                 </a:solidFill>
-                <a:latin typeface="Karla"/>
+                <a:latin typeface="Calibri"/>
               </a:rPr>
               <a:t>then I start again the next day, not the next month.</a:t>
             </a:r>
@@ -5121,7 +4945,7 @@
                 <a:solidFill>
                   <a:srgbClr val="502961"/>
                 </a:solidFill>
-                <a:latin typeface="Karla"/>
+                <a:latin typeface="Calibri"/>
               </a:rPr>
               <a:t>Write one of these on your card. One sentence, and it has to name a real obstacle.</a:t>
             </a:r>
@@ -5187,7 +5011,7 @@
                 <a:solidFill>
                   <a:srgbClr val="9C95A3"/>
                 </a:solidFill>
-                <a:latin typeface="Karla"/>
+                <a:latin typeface="Calibri"/>
               </a:rPr>
               <a:t>The Pastoral Guide</a:t>
             </a:r>
@@ -5229,7 +5053,7 @@
                 <a:solidFill>
                   <a:srgbClr val="9C95A3"/>
                 </a:solidFill>
-                <a:latin typeface="Karla"/>
+                <a:latin typeface="Calibri"/>
               </a:rPr>
               <a:t>11 / 17</a:t>
             </a:r>
@@ -5333,97 +5157,9 @@
                 <a:solidFill>
                   <a:srgbClr val="502961"/>
                 </a:solidFill>
-                <a:latin typeface="Karla"/>
+                <a:latin typeface="Calibri"/>
               </a:rPr>
               <a:t>THE BIT THAT LEAVES THIS ROOM</a:t>
-            </a:r>
-          </a:p>
-        </p:txBody>
-      </p:sp>
-      <p:sp>
-        <p:nvSpPr>
-          <p:cNvPr id="4" name="Rounded Rectangle 3"/>
-          <p:cNvSpPr/>
-          <p:nvPr/>
-        </p:nvSpPr>
-        <p:spPr>
-          <a:xfrm>
-            <a:off x="7086600" y="530352"/>
-            <a:ext cx="1371600" cy="347472"/>
-          </a:xfrm>
-          <a:prstGeom prst="roundRect">
-            <a:avLst>
-              <a:gd name="adj" fmla="val 50000"/>
-            </a:avLst>
-          </a:prstGeom>
-          <a:solidFill>
-            <a:srgbClr val="F0E4F5"/>
-          </a:solidFill>
-          <a:ln>
-            <a:noFill/>
-          </a:ln>
-          <a:effectLst/>
-        </p:spPr>
-        <p:style>
-          <a:lnRef idx="1">
-            <a:schemeClr val="accent1"/>
-          </a:lnRef>
-          <a:fillRef idx="3">
-            <a:schemeClr val="accent1"/>
-          </a:fillRef>
-          <a:effectRef idx="2">
-            <a:schemeClr val="accent1"/>
-          </a:effectRef>
-          <a:fontRef idx="minor">
-            <a:schemeClr val="lt1"/>
-          </a:fontRef>
-        </p:style>
-        <p:txBody>
-          <a:bodyPr rtlCol="0" anchor="ctr"/>
-          <a:lstStyle/>
-          <a:p>
-            <a:pPr algn="ctr"/>
-          </a:p>
-        </p:txBody>
-      </p:sp>
-      <p:sp>
-        <p:nvSpPr>
-          <p:cNvPr id="5" name="TextBox 4"/>
-          <p:cNvSpPr txBox="1"/>
-          <p:nvPr/>
-        </p:nvSpPr>
-        <p:spPr>
-          <a:xfrm>
-            <a:off x="7086600" y="589788"/>
-            <a:ext cx="1371600" cy="237744"/>
-          </a:xfrm>
-          <a:prstGeom prst="rect">
-            <a:avLst/>
-          </a:prstGeom>
-          <a:noFill/>
-        </p:spPr>
-        <p:txBody>
-          <a:bodyPr wrap="square" lIns="0" rIns="0" tIns="0" bIns="0" anchor="t">
-            <a:spAutoFit/>
-          </a:bodyPr>
-          <a:lstStyle/>
-          <a:p>
-            <a:pPr algn="ctr">
-              <a:lnSpc>
-                <a:spcPct val="125000"/>
-              </a:lnSpc>
-              <a:spcAft>
-                <a:spcPts val="0"/>
-              </a:spcAft>
-            </a:pPr>
-            <a:r>
-              <a:rPr sz="1000" b="1" i="0" spc="100">
-                <a:solidFill>
-                  <a:srgbClr val="502961"/>
-                </a:solidFill>
-                <a:latin typeface="Karla"/>
-              </a:rPr>
-              <a:t>CHOOSE</a:t>
             </a:r>
           </a:p>
         </p:txBody>
@@ -5459,11 +5195,11 @@
               </a:spcAft>
             </a:pPr>
             <a:r>
-              <a:rPr sz="3200" b="1" i="0">
+              <a:rPr sz="3200" b="0" i="0">
                 <a:solidFill>
                   <a:srgbClr val="2F2A36"/>
                 </a:solidFill>
-                <a:latin typeface="Libre Caslon Display"/>
+                <a:latin typeface="Georgia"/>
               </a:rPr>
               <a:t>The class collection</a:t>
             </a:r>
@@ -5505,7 +5241,7 @@
                 <a:solidFill>
                   <a:srgbClr val="635C6B"/>
                 </a:solidFill>
-                <a:latin typeface="Karla"/>
+                <a:latin typeface="Calibri"/>
               </a:rPr>
               <a:t>Every plan that passes all four goes in. You each get a copy to take home.</a:t>
             </a:r>
@@ -5591,11 +5327,11 @@
               </a:spcAft>
             </a:pPr>
             <a:r>
-              <a:rPr sz="1350" b="1" i="0">
+              <a:rPr sz="1350" b="0" i="0">
                 <a:solidFill>
                   <a:srgbClr val="502961"/>
                 </a:solidFill>
-                <a:latin typeface="Libre Caslon Display"/>
+                <a:latin typeface="Georgia"/>
               </a:rPr>
               <a:t>Smallest</a:t>
             </a:r>
@@ -5637,7 +5373,7 @@
                 <a:solidFill>
                   <a:srgbClr val="635C6B"/>
                 </a:solidFill>
-                <a:latin typeface="Karla"/>
+                <a:latin typeface="Calibri"/>
               </a:rPr>
               <a:t>The one with the least in it that still counts.</a:t>
             </a:r>
@@ -5723,11 +5459,11 @@
               </a:spcAft>
             </a:pPr>
             <a:r>
-              <a:rPr sz="1350" b="1" i="0">
+              <a:rPr sz="1350" b="0" i="0">
                 <a:solidFill>
                   <a:srgbClr val="502961"/>
                 </a:solidFill>
-                <a:latin typeface="Libre Caslon Display"/>
+                <a:latin typeface="Georgia"/>
               </a:rPr>
               <a:t>Easiest to remember</a:t>
             </a:r>
@@ -5769,7 +5505,7 @@
                 <a:solidFill>
                   <a:srgbClr val="635C6B"/>
                 </a:solidFill>
-                <a:latin typeface="Karla"/>
+                <a:latin typeface="Calibri"/>
               </a:rPr>
               <a:t>The one attached to something you already do every day.</a:t>
             </a:r>
@@ -5855,11 +5591,11 @@
               </a:spcAft>
             </a:pPr>
             <a:r>
-              <a:rPr sz="1350" b="1" i="0">
+              <a:rPr sz="1350" b="0" i="0">
                 <a:solidFill>
                   <a:srgbClr val="502961"/>
                 </a:solidFill>
-                <a:latin typeface="Libre Caslon Display"/>
+                <a:latin typeface="Georgia"/>
               </a:rPr>
               <a:t>The one you would steal</a:t>
             </a:r>
@@ -5901,7 +5637,7 @@
                 <a:solidFill>
                   <a:srgbClr val="635C6B"/>
                 </a:solidFill>
-                <a:latin typeface="Karla"/>
+                <a:latin typeface="Calibri"/>
               </a:rPr>
               <a:t>Not the most impressive. The one you would copy.</a:t>
             </a:r>
@@ -5943,7 +5679,7 @@
                 <a:solidFill>
                   <a:srgbClr val="502961"/>
                 </a:solidFill>
-                <a:latin typeface="Karla"/>
+                <a:latin typeface="Calibri"/>
               </a:rPr>
               <a:t>Vote on the last one. It is the best guide to who will still be going in two months.</a:t>
             </a:r>
@@ -6009,7 +5745,7 @@
                 <a:solidFill>
                   <a:srgbClr val="9C95A3"/>
                 </a:solidFill>
-                <a:latin typeface="Karla"/>
+                <a:latin typeface="Calibri"/>
               </a:rPr>
               <a:t>The Pastoral Guide</a:t>
             </a:r>
@@ -6051,7 +5787,7 @@
                 <a:solidFill>
                   <a:srgbClr val="9C95A3"/>
                 </a:solidFill>
-                <a:latin typeface="Karla"/>
+                <a:latin typeface="Calibri"/>
               </a:rPr>
               <a:t>12 / 17</a:t>
             </a:r>
@@ -6155,97 +5891,9 @@
                 <a:solidFill>
                   <a:srgbClr val="D8BCE4"/>
                 </a:solidFill>
-                <a:latin typeface="Karla"/>
+                <a:latin typeface="Calibri"/>
               </a:rPr>
               <a:t>TO BE CLEAR</a:t>
-            </a:r>
-          </a:p>
-        </p:txBody>
-      </p:sp>
-      <p:sp>
-        <p:nvSpPr>
-          <p:cNvPr id="4" name="Rounded Rectangle 3"/>
-          <p:cNvSpPr/>
-          <p:nvPr/>
-        </p:nvSpPr>
-        <p:spPr>
-          <a:xfrm>
-            <a:off x="7086600" y="530352"/>
-            <a:ext cx="1371600" cy="347472"/>
-          </a:xfrm>
-          <a:prstGeom prst="roundRect">
-            <a:avLst>
-              <a:gd name="adj" fmla="val 50000"/>
-            </a:avLst>
-          </a:prstGeom>
-          <a:solidFill>
-            <a:srgbClr val="FFFDF7"/>
-          </a:solidFill>
-          <a:ln>
-            <a:noFill/>
-          </a:ln>
-          <a:effectLst/>
-        </p:spPr>
-        <p:style>
-          <a:lnRef idx="1">
-            <a:schemeClr val="accent1"/>
-          </a:lnRef>
-          <a:fillRef idx="3">
-            <a:schemeClr val="accent1"/>
-          </a:fillRef>
-          <a:effectRef idx="2">
-            <a:schemeClr val="accent1"/>
-          </a:effectRef>
-          <a:fontRef idx="minor">
-            <a:schemeClr val="lt1"/>
-          </a:fontRef>
-        </p:style>
-        <p:txBody>
-          <a:bodyPr rtlCol="0" anchor="ctr"/>
-          <a:lstStyle/>
-          <a:p>
-            <a:pPr algn="ctr"/>
-          </a:p>
-        </p:txBody>
-      </p:sp>
-      <p:sp>
-        <p:nvSpPr>
-          <p:cNvPr id="5" name="TextBox 4"/>
-          <p:cNvSpPr txBox="1"/>
-          <p:nvPr/>
-        </p:nvSpPr>
-        <p:spPr>
-          <a:xfrm>
-            <a:off x="7086600" y="589788"/>
-            <a:ext cx="1371600" cy="237744"/>
-          </a:xfrm>
-          <a:prstGeom prst="rect">
-            <a:avLst/>
-          </a:prstGeom>
-          <a:noFill/>
-        </p:spPr>
-        <p:txBody>
-          <a:bodyPr wrap="square" lIns="0" rIns="0" tIns="0" bIns="0" anchor="t">
-            <a:spAutoFit/>
-          </a:bodyPr>
-          <a:lstStyle/>
-          <a:p>
-            <a:pPr algn="ctr">
-              <a:lnSpc>
-                <a:spcPct val="125000"/>
-              </a:lnSpc>
-              <a:spcAft>
-                <a:spcPts val="0"/>
-              </a:spcAft>
-            </a:pPr>
-            <a:r>
-              <a:rPr sz="1000" b="1" i="0" spc="100">
-                <a:solidFill>
-                  <a:srgbClr val="502961"/>
-                </a:solidFill>
-                <a:latin typeface="Karla"/>
-              </a:rPr>
-              <a:t>STRAIGHT</a:t>
             </a:r>
           </a:p>
         </p:txBody>
@@ -6281,11 +5929,11 @@
               </a:spcAft>
             </a:pPr>
             <a:r>
-              <a:rPr sz="2900" b="1" i="0">
+              <a:rPr sz="2900" b="0" i="0">
                 <a:solidFill>
                   <a:srgbClr val="FFFDF7"/>
                 </a:solidFill>
-                <a:latin typeface="Libre Caslon Display"/>
+                <a:latin typeface="Georgia"/>
               </a:rPr>
               <a:t>Most plans stop, and that is fine</a:t>
             </a:r>
@@ -6375,7 +6023,7 @@
                 <a:solidFill>
                   <a:srgbClr val="502961"/>
                 </a:solidFill>
-                <a:latin typeface="Karla"/>
+                <a:latin typeface="Calibri"/>
               </a:rPr>
               <a:t>Almost everybody who starts something like this stops at some point.</a:t>
             </a:r>
@@ -6465,7 +6113,7 @@
                 <a:solidFill>
                   <a:srgbClr val="502961"/>
                 </a:solidFill>
-                <a:latin typeface="Karla"/>
+                <a:latin typeface="Calibri"/>
               </a:rPr>
               <a:t>Stopping is not failing. It is a normal part of doing anything.</a:t>
             </a:r>
@@ -6555,7 +6203,7 @@
                 <a:solidFill>
                   <a:srgbClr val="502961"/>
                 </a:solidFill>
-                <a:latin typeface="Karla"/>
+                <a:latin typeface="Calibri"/>
               </a:rPr>
               <a:t>If it stops, you start again at week one. Never at week four.</a:t>
             </a:r>
@@ -6597,7 +6245,7 @@
                 <a:solidFill>
                   <a:srgbClr val="FFFDF7"/>
                 </a:solidFill>
-                <a:latin typeface="Karla"/>
+                <a:latin typeface="Calibri"/>
               </a:rPr>
               <a:t>Nobody keeps a streak. People keep coming back to it.</a:t>
             </a:r>
@@ -6663,7 +6311,7 @@
                 <a:solidFill>
                   <a:srgbClr val="D8BCE4"/>
                 </a:solidFill>
-                <a:latin typeface="Karla"/>
+                <a:latin typeface="Calibri"/>
               </a:rPr>
               <a:t>The Pastoral Guide</a:t>
             </a:r>
@@ -6705,7 +6353,7 @@
                 <a:solidFill>
                   <a:srgbClr val="D8BCE4"/>
                 </a:solidFill>
-                <a:latin typeface="Karla"/>
+                <a:latin typeface="Calibri"/>
               </a:rPr>
               <a:t>13 / 17</a:t>
             </a:r>
@@ -6809,97 +6457,9 @@
                 <a:solidFill>
                   <a:srgbClr val="502961"/>
                 </a:solidFill>
-                <a:latin typeface="Karla"/>
+                <a:latin typeface="Calibri"/>
               </a:rPr>
               <a:t>FIND YOUR SHEET FROM LESSON ONE</a:t>
-            </a:r>
-          </a:p>
-        </p:txBody>
-      </p:sp>
-      <p:sp>
-        <p:nvSpPr>
-          <p:cNvPr id="4" name="Rounded Rectangle 3"/>
-          <p:cNvSpPr/>
-          <p:nvPr/>
-        </p:nvSpPr>
-        <p:spPr>
-          <a:xfrm>
-            <a:off x="6976872" y="530352"/>
-            <a:ext cx="1481328" cy="347472"/>
-          </a:xfrm>
-          <a:prstGeom prst="roundRect">
-            <a:avLst>
-              <a:gd name="adj" fmla="val 50000"/>
-            </a:avLst>
-          </a:prstGeom>
-          <a:solidFill>
-            <a:srgbClr val="F0E4F5"/>
-          </a:solidFill>
-          <a:ln>
-            <a:noFill/>
-          </a:ln>
-          <a:effectLst/>
-        </p:spPr>
-        <p:style>
-          <a:lnRef idx="1">
-            <a:schemeClr val="accent1"/>
-          </a:lnRef>
-          <a:fillRef idx="3">
-            <a:schemeClr val="accent1"/>
-          </a:fillRef>
-          <a:effectRef idx="2">
-            <a:schemeClr val="accent1"/>
-          </a:effectRef>
-          <a:fontRef idx="minor">
-            <a:schemeClr val="lt1"/>
-          </a:fontRef>
-        </p:style>
-        <p:txBody>
-          <a:bodyPr rtlCol="0" anchor="ctr"/>
-          <a:lstStyle/>
-          <a:p>
-            <a:pPr algn="ctr"/>
-          </a:p>
-        </p:txBody>
-      </p:sp>
-      <p:sp>
-        <p:nvSpPr>
-          <p:cNvPr id="5" name="TextBox 4"/>
-          <p:cNvSpPr txBox="1"/>
-          <p:nvPr/>
-        </p:nvSpPr>
-        <p:spPr>
-          <a:xfrm>
-            <a:off x="6976872" y="589788"/>
-            <a:ext cx="1481328" cy="237744"/>
-          </a:xfrm>
-          <a:prstGeom prst="rect">
-            <a:avLst/>
-          </a:prstGeom>
-          <a:noFill/>
-        </p:spPr>
-        <p:txBody>
-          <a:bodyPr wrap="square" lIns="0" rIns="0" tIns="0" bIns="0" anchor="t">
-            <a:spAutoFit/>
-          </a:bodyPr>
-          <a:lstStyle/>
-          <a:p>
-            <a:pPr algn="ctr">
-              <a:lnSpc>
-                <a:spcPct val="125000"/>
-              </a:lnSpc>
-              <a:spcAft>
-                <a:spcPts val="0"/>
-              </a:spcAft>
-            </a:pPr>
-            <a:r>
-              <a:rPr sz="1000" b="1" i="0" spc="100">
-                <a:solidFill>
-                  <a:srgbClr val="502961"/>
-                </a:solidFill>
-                <a:latin typeface="Karla"/>
-              </a:rPr>
-              <a:t>LOOK BACK</a:t>
             </a:r>
           </a:p>
         </p:txBody>
@@ -6935,11 +6495,11 @@
               </a:spcAft>
             </a:pPr>
             <a:r>
-              <a:rPr sz="3200" b="1" i="0">
+              <a:rPr sz="3200" b="0" i="0">
                 <a:solidFill>
                   <a:srgbClr val="2F2A36"/>
                 </a:solidFill>
-                <a:latin typeface="Libre Caslon Display"/>
+                <a:latin typeface="Georgia"/>
               </a:rPr>
               <a:t>Your very first guess</a:t>
             </a:r>
@@ -6981,7 +6541,7 @@
                 <a:solidFill>
                   <a:srgbClr val="635C6B"/>
                 </a:solidFill>
-                <a:latin typeface="Karla"/>
+                <a:latin typeface="Calibri"/>
               </a:rPr>
               <a:t>The prediction you wrote before you had measured anything. Look at the numbers.</a:t>
             </a:r>
@@ -7111,11 +6671,11 @@
               </a:spcAft>
             </a:pPr>
             <a:r>
-              <a:rPr sz="1200" b="1" i="0">
+              <a:rPr sz="1200" b="0" i="0">
                 <a:solidFill>
                   <a:srgbClr val="FFFDF7"/>
                 </a:solidFill>
-                <a:latin typeface="Libre Caslon Display"/>
+                <a:latin typeface="Georgia"/>
               </a:rPr>
               <a:t>1</a:t>
             </a:r>
@@ -7157,7 +6717,7 @@
                 <a:solidFill>
                   <a:srgbClr val="2F2A36"/>
                 </a:solidFill>
-                <a:latin typeface="Karla"/>
+                <a:latin typeface="Calibri"/>
               </a:rPr>
               <a:t>How far out were you, and in which direction?</a:t>
             </a:r>
@@ -7287,11 +6847,11 @@
               </a:spcAft>
             </a:pPr>
             <a:r>
-              <a:rPr sz="1200" b="1" i="0">
+              <a:rPr sz="1200" b="0" i="0">
                 <a:solidFill>
                   <a:srgbClr val="FFFDF7"/>
                 </a:solidFill>
-                <a:latin typeface="Libre Caslon Display"/>
+                <a:latin typeface="Georgia"/>
               </a:rPr>
               <a:t>2</a:t>
             </a:r>
@@ -7333,7 +6893,7 @@
                 <a:solidFill>
                   <a:srgbClr val="2F2A36"/>
                 </a:solidFill>
-                <a:latin typeface="Karla"/>
+                <a:latin typeface="Calibri"/>
               </a:rPr>
               <a:t>Which of the three numbers surprised you most on the day?</a:t>
             </a:r>
@@ -7463,11 +7023,11 @@
               </a:spcAft>
             </a:pPr>
             <a:r>
-              <a:rPr sz="1200" b="1" i="0">
+              <a:rPr sz="1200" b="0" i="0">
                 <a:solidFill>
                   <a:srgbClr val="FFFDF7"/>
                 </a:solidFill>
-                <a:latin typeface="Libre Caslon Display"/>
+                <a:latin typeface="Georgia"/>
               </a:rPr>
               <a:t>3</a:t>
             </a:r>
@@ -7509,7 +7069,7 @@
                 <a:solidFill>
                   <a:srgbClr val="2F2A36"/>
                 </a:solidFill>
-                <a:latin typeface="Karla"/>
+                <a:latin typeface="Calibri"/>
               </a:rPr>
               <a:t>What do you know now that would have changed the guess?</a:t>
             </a:r>
@@ -7551,7 +7111,7 @@
                 <a:solidFill>
                   <a:srgbClr val="502961"/>
                 </a:solidFill>
-                <a:latin typeface="Karla"/>
+                <a:latin typeface="Calibri"/>
               </a:rPr>
               <a:t>In lesson one you guessed. Then you measured. Now you have a plan.</a:t>
             </a:r>
@@ -7617,7 +7177,7 @@
                 <a:solidFill>
                   <a:srgbClr val="9C95A3"/>
                 </a:solidFill>
-                <a:latin typeface="Karla"/>
+                <a:latin typeface="Calibri"/>
               </a:rPr>
               <a:t>The Pastoral Guide</a:t>
             </a:r>
@@ -7659,7 +7219,7 @@
                 <a:solidFill>
                   <a:srgbClr val="9C95A3"/>
                 </a:solidFill>
-                <a:latin typeface="Karla"/>
+                <a:latin typeface="Calibri"/>
               </a:rPr>
               <a:t>14 / 17</a:t>
             </a:r>
@@ -7763,97 +7323,9 @@
                 <a:solidFill>
                   <a:srgbClr val="502961"/>
                 </a:solidFill>
-                <a:latin typeface="Karla"/>
+                <a:latin typeface="Calibri"/>
               </a:rPr>
               <a:t>ON THE BACK OF YOUR LESSON SHEET</a:t>
-            </a:r>
-          </a:p>
-        </p:txBody>
-      </p:sp>
-      <p:sp>
-        <p:nvSpPr>
-          <p:cNvPr id="4" name="Rounded Rectangle 3"/>
-          <p:cNvSpPr/>
-          <p:nvPr/>
-        </p:nvSpPr>
-        <p:spPr>
-          <a:xfrm>
-            <a:off x="7086600" y="530352"/>
-            <a:ext cx="1371600" cy="347472"/>
-          </a:xfrm>
-          <a:prstGeom prst="roundRect">
-            <a:avLst>
-              <a:gd name="adj" fmla="val 50000"/>
-            </a:avLst>
-          </a:prstGeom>
-          <a:solidFill>
-            <a:srgbClr val="F0E4F5"/>
-          </a:solidFill>
-          <a:ln>
-            <a:noFill/>
-          </a:ln>
-          <a:effectLst/>
-        </p:spPr>
-        <p:style>
-          <a:lnRef idx="1">
-            <a:schemeClr val="accent1"/>
-          </a:lnRef>
-          <a:fillRef idx="3">
-            <a:schemeClr val="accent1"/>
-          </a:fillRef>
-          <a:effectRef idx="2">
-            <a:schemeClr val="accent1"/>
-          </a:effectRef>
-          <a:fontRef idx="minor">
-            <a:schemeClr val="lt1"/>
-          </a:fontRef>
-        </p:style>
-        <p:txBody>
-          <a:bodyPr rtlCol="0" anchor="ctr"/>
-          <a:lstStyle/>
-          <a:p>
-            <a:pPr algn="ctr"/>
-          </a:p>
-        </p:txBody>
-      </p:sp>
-      <p:sp>
-        <p:nvSpPr>
-          <p:cNvPr id="5" name="TextBox 4"/>
-          <p:cNvSpPr txBox="1"/>
-          <p:nvPr/>
-        </p:nvSpPr>
-        <p:spPr>
-          <a:xfrm>
-            <a:off x="7086600" y="589788"/>
-            <a:ext cx="1371600" cy="237744"/>
-          </a:xfrm>
-          <a:prstGeom prst="rect">
-            <a:avLst/>
-          </a:prstGeom>
-          <a:noFill/>
-        </p:spPr>
-        <p:txBody>
-          <a:bodyPr wrap="square" lIns="0" rIns="0" tIns="0" bIns="0" anchor="t">
-            <a:spAutoFit/>
-          </a:bodyPr>
-          <a:lstStyle/>
-          <a:p>
-            <a:pPr algn="ctr">
-              <a:lnSpc>
-                <a:spcPct val="125000"/>
-              </a:lnSpc>
-              <a:spcAft>
-                <a:spcPts val="0"/>
-              </a:spcAft>
-            </a:pPr>
-            <a:r>
-              <a:rPr sz="1000" b="1" i="0" spc="100">
-                <a:solidFill>
-                  <a:srgbClr val="502961"/>
-                </a:solidFill>
-                <a:latin typeface="Karla"/>
-              </a:rPr>
-              <a:t>EXIT SLIP</a:t>
             </a:r>
           </a:p>
         </p:txBody>
@@ -7889,11 +7361,11 @@
               </a:spcAft>
             </a:pPr>
             <a:r>
-              <a:rPr sz="3200" b="1" i="0">
+              <a:rPr sz="3200" b="0" i="0">
                 <a:solidFill>
                   <a:srgbClr val="2F2A36"/>
                 </a:solidFill>
-                <a:latin typeface="Libre Caslon Display"/>
+                <a:latin typeface="Georgia"/>
               </a:rPr>
               <a:t>The first one. When?</a:t>
             </a:r>
@@ -7935,7 +7407,7 @@
                 <a:solidFill>
                   <a:srgbClr val="635C6B"/>
                 </a:solidFill>
-                <a:latin typeface="Karla"/>
+                <a:latin typeface="Calibri"/>
               </a:rPr>
               <a:t>Not collected. Put it somewhere you will see it before the day you have written down.</a:t>
             </a:r>
@@ -8021,11 +7493,11 @@
               </a:spcAft>
             </a:pPr>
             <a:r>
-              <a:rPr sz="1300" b="1" i="0">
+              <a:rPr sz="1300" b="0" i="0">
                 <a:solidFill>
                   <a:srgbClr val="502961"/>
                 </a:solidFill>
-                <a:latin typeface="Libre Caslon Display"/>
+                <a:latin typeface="Georgia"/>
               </a:rPr>
               <a:t>What I am doing</a:t>
             </a:r>
@@ -8067,7 +7539,7 @@
                 <a:solidFill>
                   <a:srgbClr val="635C6B"/>
                 </a:solidFill>
-                <a:latin typeface="Karla"/>
+                <a:latin typeface="Calibri"/>
               </a:rPr>
               <a:t>The week one version. The small one.</a:t>
             </a:r>
@@ -8153,11 +7625,11 @@
               </a:spcAft>
             </a:pPr>
             <a:r>
-              <a:rPr sz="1300" b="1" i="0">
+              <a:rPr sz="1300" b="0" i="0">
                 <a:solidFill>
                   <a:srgbClr val="502961"/>
                 </a:solidFill>
-                <a:latin typeface="Libre Caslon Display"/>
+                <a:latin typeface="Georgia"/>
               </a:rPr>
               <a:t>Which day, after what</a:t>
             </a:r>
@@ -8199,7 +7671,7 @@
                 <a:solidFill>
                   <a:srgbClr val="635C6B"/>
                 </a:solidFill>
-                <a:latin typeface="Karla"/>
+                <a:latin typeface="Calibri"/>
               </a:rPr>
               <a:t>A day and a thing it follows. Both, or it will not happen.</a:t>
             </a:r>
@@ -8285,11 +7757,11 @@
               </a:spcAft>
             </a:pPr>
             <a:r>
-              <a:rPr sz="1300" b="1" i="0">
+              <a:rPr sz="1300" b="0" i="0">
                 <a:solidFill>
                   <a:srgbClr val="502961"/>
                 </a:solidFill>
-                <a:latin typeface="Libre Caslon Display"/>
+                <a:latin typeface="Georgia"/>
               </a:rPr>
               <a:t>If that fails, then</a:t>
             </a:r>
@@ -8331,7 +7803,7 @@
                 <a:solidFill>
                   <a:srgbClr val="635C6B"/>
                 </a:solidFill>
-                <a:latin typeface="Karla"/>
+                <a:latin typeface="Calibri"/>
               </a:rPr>
               <a:t>Your one sentence from the if-then slide.</a:t>
             </a:r>
@@ -8373,7 +7845,7 @@
                 <a:solidFill>
                   <a:srgbClr val="502961"/>
                 </a:solidFill>
-                <a:latin typeface="Karla"/>
+                <a:latin typeface="Calibri"/>
               </a:rPr>
               <a:t>A day with nothing attached is a wish, not a plan. Write down the thing it comes after.</a:t>
             </a:r>
@@ -8439,7 +7911,7 @@
                 <a:solidFill>
                   <a:srgbClr val="9C95A3"/>
                 </a:solidFill>
-                <a:latin typeface="Karla"/>
+                <a:latin typeface="Calibri"/>
               </a:rPr>
               <a:t>The Pastoral Guide</a:t>
             </a:r>
@@ -8481,7 +7953,7 @@
                 <a:solidFill>
                   <a:srgbClr val="9C95A3"/>
                 </a:solidFill>
-                <a:latin typeface="Karla"/>
+                <a:latin typeface="Calibri"/>
               </a:rPr>
               <a:t>15 / 17</a:t>
             </a:r>
@@ -8585,7 +8057,7 @@
                 <a:solidFill>
                   <a:srgbClr val="D8BCE4"/>
                 </a:solidFill>
-                <a:latin typeface="Karla"/>
+                <a:latin typeface="Calibri"/>
               </a:rPr>
               <a:t>IF YOU REMEMBER ONE THING</a:t>
             </a:r>
@@ -8623,21 +8095,21 @@
               </a:spcAft>
             </a:pPr>
             <a:r>
-              <a:rPr sz="3400" b="1" i="0">
+              <a:rPr sz="3400" b="0" i="0">
                 <a:solidFill>
                   <a:srgbClr val="FFFDF7"/>
                 </a:solidFill>
-                <a:latin typeface="Libre Caslon Display"/>
+                <a:latin typeface="Georgia"/>
               </a:rPr>
               <a:t>Week one is meant to feel</a:t>
             </a:r>
             <a:br/>
             <a:r>
-              <a:rPr sz="3400" b="1" i="0">
+              <a:rPr sz="3400" b="0" i="0">
                 <a:solidFill>
                   <a:srgbClr val="FFFDF7"/>
                 </a:solidFill>
-                <a:latin typeface="Libre Caslon Display"/>
+                <a:latin typeface="Georgia"/>
               </a:rPr>
               <a:t>like almost nothing.</a:t>
             </a:r>
@@ -8723,7 +8195,7 @@
                 <a:solidFill>
                   <a:srgbClr val="D8BCE4"/>
                 </a:solidFill>
-                <a:latin typeface="Karla"/>
+                <a:latin typeface="Calibri"/>
               </a:rPr>
               <a:t>The plans that survive are the ones</a:t>
             </a:r>
@@ -8733,7 +8205,7 @@
                 <a:solidFill>
                   <a:srgbClr val="D8BCE4"/>
                 </a:solidFill>
-                <a:latin typeface="Karla"/>
+                <a:latin typeface="Calibri"/>
               </a:rPr>
               <a:t>that looked too small to bother writing down.</a:t>
             </a:r>
@@ -8799,7 +8271,7 @@
                 <a:solidFill>
                   <a:srgbClr val="D8BCE4"/>
                 </a:solidFill>
-                <a:latin typeface="Karla"/>
+                <a:latin typeface="Calibri"/>
               </a:rPr>
               <a:t>The Pastoral Guide</a:t>
             </a:r>
@@ -8841,7 +8313,7 @@
                 <a:solidFill>
                   <a:srgbClr val="D8BCE4"/>
                 </a:solidFill>
-                <a:latin typeface="Karla"/>
+                <a:latin typeface="Calibri"/>
               </a:rPr>
               <a:t>16 / 17</a:t>
             </a:r>
@@ -8965,11 +8437,11 @@
               </a:spcAft>
             </a:pPr>
             <a:r>
-              <a:rPr sz="3000" b="1" i="0">
+              <a:rPr sz="3000" b="0" i="0">
                 <a:solidFill>
                   <a:srgbClr val="502961"/>
                 </a:solidFill>
-                <a:latin typeface="Libre Caslon Display"/>
+                <a:latin typeface="Georgia"/>
               </a:rPr>
               <a:t>That is the series.</a:t>
             </a:r>
@@ -9011,7 +8483,7 @@
                 <a:solidFill>
                   <a:srgbClr val="635C6B"/>
                 </a:solidFill>
-                <a:latin typeface="Karla"/>
+                <a:latin typeface="Calibri"/>
               </a:rPr>
               <a:t>A prediction, three numbers you measured yourselves,</a:t>
             </a:r>
@@ -9021,7 +8493,7 @@
                 <a:solidFill>
                   <a:srgbClr val="635C6B"/>
                 </a:solidFill>
-                <a:latin typeface="Karla"/>
+                <a:latin typeface="Calibri"/>
               </a:rPr>
               <a:t>and four weeks small enough to survive.</a:t>
             </a:r>
@@ -9063,7 +8535,7 @@
                 <a:solidFill>
                   <a:srgbClr val="9C95A3"/>
                 </a:solidFill>
-                <a:latin typeface="Karla"/>
+                <a:latin typeface="Calibri"/>
               </a:rPr>
               <a:t>Movement and Mental Health  ·  Lesson 3 of 3</a:t>
             </a:r>
@@ -9129,7 +8601,7 @@
                 <a:solidFill>
                   <a:srgbClr val="9C95A3"/>
                 </a:solidFill>
-                <a:latin typeface="Karla"/>
+                <a:latin typeface="Calibri"/>
               </a:rPr>
               <a:t>The Pastoral Guide</a:t>
             </a:r>
@@ -9171,7 +8643,7 @@
                 <a:solidFill>
                   <a:srgbClr val="9C95A3"/>
                 </a:solidFill>
-                <a:latin typeface="Karla"/>
+                <a:latin typeface="Calibri"/>
               </a:rPr>
               <a:t>17 / 17</a:t>
             </a:r>
@@ -9321,7 +8793,7 @@
                 <a:solidFill>
                   <a:srgbClr val="502961"/>
                 </a:solidFill>
-                <a:latin typeface="Karla"/>
+                <a:latin typeface="Calibri"/>
               </a:rPr>
               <a:t>TEACHER SLIDE  ·  SKIP IT</a:t>
             </a:r>
@@ -9363,7 +8835,7 @@
                 <a:solidFill>
                   <a:srgbClr val="502961"/>
                 </a:solidFill>
-                <a:latin typeface="Karla"/>
+                <a:latin typeface="Calibri"/>
               </a:rPr>
               <a:t>TWO THINGS TO KNOW FIRST</a:t>
             </a:r>
@@ -9401,11 +8873,11 @@
               </a:spcAft>
             </a:pPr>
             <a:r>
-              <a:rPr sz="3100" b="1" i="0">
+              <a:rPr sz="3100" b="0" i="0">
                 <a:solidFill>
                   <a:srgbClr val="2F2A36"/>
                 </a:solidFill>
-                <a:latin typeface="Libre Caslon Display"/>
+                <a:latin typeface="Georgia"/>
               </a:rPr>
               <a:t>Before they start</a:t>
             </a:r>
@@ -9535,11 +9007,11 @@
               </a:spcAft>
             </a:pPr>
             <a:r>
-              <a:rPr sz="1400" b="1" i="0">
+              <a:rPr sz="1400" b="0" i="0">
                 <a:solidFill>
                   <a:srgbClr val="FFFDF7"/>
                 </a:solidFill>
-                <a:latin typeface="Libre Caslon Display"/>
+                <a:latin typeface="Georgia"/>
               </a:rPr>
               <a:t>1</a:t>
             </a:r>
@@ -9577,11 +9049,11 @@
               </a:spcAft>
             </a:pPr>
             <a:r>
-              <a:rPr sz="1500" b="1" i="0">
+              <a:rPr sz="1500" b="0" i="0">
                 <a:solidFill>
                   <a:srgbClr val="502961"/>
                 </a:solidFill>
-                <a:latin typeface="Libre Caslon Display"/>
+                <a:latin typeface="Georgia"/>
               </a:rPr>
               <a:t>Plans get marked by somebody else</a:t>
             </a:r>
@@ -9623,7 +9095,7 @@
                 <a:solidFill>
                   <a:srgbClr val="635C6B"/>
                 </a:solidFill>
-                <a:latin typeface="Karla"/>
+                <a:latin typeface="Calibri"/>
               </a:rPr>
               <a:t>Cards pass two tables along. Nobody marks their own, and nobody is marked on whether they can already do any of it.</a:t>
             </a:r>
@@ -9753,11 +9225,11 @@
               </a:spcAft>
             </a:pPr>
             <a:r>
-              <a:rPr sz="1400" b="1" i="0">
+              <a:rPr sz="1400" b="0" i="0">
                 <a:solidFill>
                   <a:srgbClr val="FFFDF7"/>
                 </a:solidFill>
-                <a:latin typeface="Libre Caslon Display"/>
+                <a:latin typeface="Georgia"/>
               </a:rPr>
               <a:t>2</a:t>
             </a:r>
@@ -9795,11 +9267,11 @@
               </a:spcAft>
             </a:pPr>
             <a:r>
-              <a:rPr sz="1500" b="1" i="0">
+              <a:rPr sz="1500" b="0" i="0">
                 <a:solidFill>
                   <a:srgbClr val="502961"/>
                 </a:solidFill>
-                <a:latin typeface="Libre Caslon Display"/>
+                <a:latin typeface="Georgia"/>
               </a:rPr>
               <a:t>Some plans will not involve moving much</a:t>
             </a:r>
@@ -9841,7 +9313,7 @@
                 <a:solidFill>
                   <a:srgbClr val="635C6B"/>
                 </a:solidFill>
-                <a:latin typeface="Karla"/>
+                <a:latin typeface="Calibri"/>
               </a:rPr>
               <a:t>A student with an injury, a condition or a difficult home can still write a plan that passes all four tests. Seated plans count. Say so before they start writing.</a:t>
             </a:r>
@@ -9883,7 +9355,7 @@
                 <a:solidFill>
                   <a:srgbClr val="502961"/>
                 </a:solidFill>
-                <a:latin typeface="Karla"/>
+                <a:latin typeface="Calibri"/>
               </a:rPr>
               <a:t>Have spare cards ready. Nobody leaves without a plan.</a:t>
             </a:r>
@@ -9949,7 +9421,7 @@
                 <a:solidFill>
                   <a:srgbClr val="9C95A3"/>
                 </a:solidFill>
-                <a:latin typeface="Karla"/>
+                <a:latin typeface="Calibri"/>
               </a:rPr>
               <a:t>The Pastoral Guide</a:t>
             </a:r>
@@ -9991,7 +9463,7 @@
                 <a:solidFill>
                   <a:srgbClr val="9C95A3"/>
                 </a:solidFill>
-                <a:latin typeface="Karla"/>
+                <a:latin typeface="Calibri"/>
               </a:rPr>
               <a:t>2 / 17</a:t>
             </a:r>
@@ -10095,97 +9567,9 @@
                 <a:solidFill>
                   <a:srgbClr val="D8BCE4"/>
                 </a:solidFill>
-                <a:latin typeface="Karla"/>
+                <a:latin typeface="Calibri"/>
               </a:rPr>
               <a:t>WHAT THIS ROOM FOUND OUT</a:t>
-            </a:r>
-          </a:p>
-        </p:txBody>
-      </p:sp>
-      <p:sp>
-        <p:nvSpPr>
-          <p:cNvPr id="4" name="Rounded Rectangle 3"/>
-          <p:cNvSpPr/>
-          <p:nvPr/>
-        </p:nvSpPr>
-        <p:spPr>
-          <a:xfrm>
-            <a:off x="7086600" y="530352"/>
-            <a:ext cx="1371600" cy="347472"/>
-          </a:xfrm>
-          <a:prstGeom prst="roundRect">
-            <a:avLst>
-              <a:gd name="adj" fmla="val 50000"/>
-            </a:avLst>
-          </a:prstGeom>
-          <a:solidFill>
-            <a:srgbClr val="FFFDF7"/>
-          </a:solidFill>
-          <a:ln>
-            <a:noFill/>
-          </a:ln>
-          <a:effectLst/>
-        </p:spPr>
-        <p:style>
-          <a:lnRef idx="1">
-            <a:schemeClr val="accent1"/>
-          </a:lnRef>
-          <a:fillRef idx="3">
-            <a:schemeClr val="accent1"/>
-          </a:fillRef>
-          <a:effectRef idx="2">
-            <a:schemeClr val="accent1"/>
-          </a:effectRef>
-          <a:fontRef idx="minor">
-            <a:schemeClr val="lt1"/>
-          </a:fontRef>
-        </p:style>
-        <p:txBody>
-          <a:bodyPr rtlCol="0" anchor="ctr"/>
-          <a:lstStyle/>
-          <a:p>
-            <a:pPr algn="ctr"/>
-          </a:p>
-        </p:txBody>
-      </p:sp>
-      <p:sp>
-        <p:nvSpPr>
-          <p:cNvPr id="5" name="TextBox 4"/>
-          <p:cNvSpPr txBox="1"/>
-          <p:nvPr/>
-        </p:nvSpPr>
-        <p:spPr>
-          <a:xfrm>
-            <a:off x="7086600" y="589788"/>
-            <a:ext cx="1371600" cy="237744"/>
-          </a:xfrm>
-          <a:prstGeom prst="rect">
-            <a:avLst/>
-          </a:prstGeom>
-          <a:noFill/>
-        </p:spPr>
-        <p:txBody>
-          <a:bodyPr wrap="square" lIns="0" rIns="0" tIns="0" bIns="0" anchor="t">
-            <a:spAutoFit/>
-          </a:bodyPr>
-          <a:lstStyle/>
-          <a:p>
-            <a:pPr algn="ctr">
-              <a:lnSpc>
-                <a:spcPct val="125000"/>
-              </a:lnSpc>
-              <a:spcAft>
-                <a:spcPts val="0"/>
-              </a:spcAft>
-            </a:pPr>
-            <a:r>
-              <a:rPr sz="1000" b="1" i="0" spc="100">
-                <a:solidFill>
-                  <a:srgbClr val="502961"/>
-                </a:solidFill>
-                <a:latin typeface="Karla"/>
-              </a:rPr>
-              <a:t>RECAP</a:t>
             </a:r>
           </a:p>
         </p:txBody>
@@ -10221,11 +9605,11 @@
               </a:spcAft>
             </a:pPr>
             <a:r>
-              <a:rPr sz="2800" b="1" i="0">
+              <a:rPr sz="2800" b="0" i="0">
                 <a:solidFill>
                   <a:srgbClr val="FFFDF7"/>
                 </a:solidFill>
-                <a:latin typeface="Libre Caslon Display"/>
+                <a:latin typeface="Georgia"/>
               </a:rPr>
               <a:t>You have already proved it works</a:t>
             </a:r>
@@ -10311,11 +9695,11 @@
               </a:spcAft>
             </a:pPr>
             <a:r>
-              <a:rPr sz="1300" b="1" i="0">
+              <a:rPr sz="1300" b="0" i="0">
                 <a:solidFill>
                   <a:srgbClr val="502961"/>
                 </a:solidFill>
-                <a:latin typeface="Libre Caslon Display"/>
+                <a:latin typeface="Georgia"/>
               </a:rPr>
               <a:t>Five minutes moved the numbers.</a:t>
             </a:r>
@@ -10357,7 +9741,7 @@
                 <a:solidFill>
                   <a:srgbClr val="635C6B"/>
                 </a:solidFill>
-                <a:latin typeface="Karla"/>
+                <a:latin typeface="Calibri"/>
               </a:rPr>
               <a:t>Almost everybody’s pulse went up and most people’s focus did too.</a:t>
             </a:r>
@@ -10443,11 +9827,11 @@
               </a:spcAft>
             </a:pPr>
             <a:r>
-              <a:rPr sz="1300" b="1" i="0">
+              <a:rPr sz="1300" b="0" i="0">
                 <a:solidFill>
                   <a:srgbClr val="502961"/>
                 </a:solidFill>
-                <a:latin typeface="Libre Caslon Display"/>
+                <a:latin typeface="Georgia"/>
               </a:rPr>
               <a:t>Ten minutes later it was still there.</a:t>
             </a:r>
@@ -10489,7 +9873,7 @@
                 <a:solidFill>
                   <a:srgbClr val="635C6B"/>
                 </a:solidFill>
-                <a:latin typeface="Karla"/>
+                <a:latin typeface="Calibri"/>
               </a:rPr>
               <a:t>The heart went back. The head took longer, which is the useful part.</a:t>
             </a:r>
@@ -10575,11 +9959,11 @@
               </a:spcAft>
             </a:pPr>
             <a:r>
-              <a:rPr sz="1300" b="1" i="0">
+              <a:rPr sz="1300" b="0" i="0">
                 <a:solidFill>
                   <a:srgbClr val="502961"/>
                 </a:solidFill>
-                <a:latin typeface="Libre Caslon Display"/>
+                <a:latin typeface="Georgia"/>
               </a:rPr>
               <a:t>And then the lesson ended.</a:t>
             </a:r>
@@ -10621,7 +10005,7 @@
                 <a:solidFill>
                   <a:srgbClr val="635C6B"/>
                 </a:solidFill>
-                <a:latin typeface="Karla"/>
+                <a:latin typeface="Calibri"/>
               </a:rPr>
               <a:t>Nobody has done it since, and that is the problem this lesson is about.</a:t>
             </a:r>
@@ -10663,7 +10047,7 @@
                 <a:solidFill>
                   <a:srgbClr val="FFFDF7"/>
                 </a:solidFill>
-                <a:latin typeface="Karla"/>
+                <a:latin typeface="Calibri"/>
               </a:rPr>
               <a:t>Knowing that it works has never been the hard part.</a:t>
             </a:r>
@@ -10729,7 +10113,7 @@
                 <a:solidFill>
                   <a:srgbClr val="D8BCE4"/>
                 </a:solidFill>
-                <a:latin typeface="Karla"/>
+                <a:latin typeface="Calibri"/>
               </a:rPr>
               <a:t>The Pastoral Guide</a:t>
             </a:r>
@@ -10771,7 +10155,7 @@
                 <a:solidFill>
                   <a:srgbClr val="D8BCE4"/>
                 </a:solidFill>
-                <a:latin typeface="Karla"/>
+                <a:latin typeface="Calibri"/>
               </a:rPr>
               <a:t>3 / 17</a:t>
             </a:r>
@@ -10875,97 +10259,9 @@
                 <a:solidFill>
                   <a:srgbClr val="502961"/>
                 </a:solidFill>
-                <a:latin typeface="Karla"/>
+                <a:latin typeface="Calibri"/>
               </a:rPr>
               <a:t>WHY THIS LESSON EXISTS</a:t>
-            </a:r>
-          </a:p>
-        </p:txBody>
-      </p:sp>
-      <p:sp>
-        <p:nvSpPr>
-          <p:cNvPr id="4" name="Rounded Rectangle 3"/>
-          <p:cNvSpPr/>
-          <p:nvPr/>
-        </p:nvSpPr>
-        <p:spPr>
-          <a:xfrm>
-            <a:off x="7050024" y="530352"/>
-            <a:ext cx="1408176" cy="347472"/>
-          </a:xfrm>
-          <a:prstGeom prst="roundRect">
-            <a:avLst>
-              <a:gd name="adj" fmla="val 50000"/>
-            </a:avLst>
-          </a:prstGeom>
-          <a:solidFill>
-            <a:srgbClr val="F0E4F5"/>
-          </a:solidFill>
-          <a:ln>
-            <a:noFill/>
-          </a:ln>
-          <a:effectLst/>
-        </p:spPr>
-        <p:style>
-          <a:lnRef idx="1">
-            <a:schemeClr val="accent1"/>
-          </a:lnRef>
-          <a:fillRef idx="3">
-            <a:schemeClr val="accent1"/>
-          </a:fillRef>
-          <a:effectRef idx="2">
-            <a:schemeClr val="accent1"/>
-          </a:effectRef>
-          <a:fontRef idx="minor">
-            <a:schemeClr val="lt1"/>
-          </a:fontRef>
-        </p:style>
-        <p:txBody>
-          <a:bodyPr rtlCol="0" anchor="ctr"/>
-          <a:lstStyle/>
-          <a:p>
-            <a:pPr algn="ctr"/>
-          </a:p>
-        </p:txBody>
-      </p:sp>
-      <p:sp>
-        <p:nvSpPr>
-          <p:cNvPr id="5" name="TextBox 4"/>
-          <p:cNvSpPr txBox="1"/>
-          <p:nvPr/>
-        </p:nvSpPr>
-        <p:spPr>
-          <a:xfrm>
-            <a:off x="7050024" y="589788"/>
-            <a:ext cx="1408176" cy="237744"/>
-          </a:xfrm>
-          <a:prstGeom prst="rect">
-            <a:avLst/>
-          </a:prstGeom>
-          <a:noFill/>
-        </p:spPr>
-        <p:txBody>
-          <a:bodyPr wrap="square" lIns="0" rIns="0" tIns="0" bIns="0" anchor="t">
-            <a:spAutoFit/>
-          </a:bodyPr>
-          <a:lstStyle/>
-          <a:p>
-            <a:pPr algn="ctr">
-              <a:lnSpc>
-                <a:spcPct val="125000"/>
-              </a:lnSpc>
-              <a:spcAft>
-                <a:spcPts val="0"/>
-              </a:spcAft>
-            </a:pPr>
-            <a:r>
-              <a:rPr sz="1000" b="1" i="0" spc="100">
-                <a:solidFill>
-                  <a:srgbClr val="502961"/>
-                </a:solidFill>
-                <a:latin typeface="Karla"/>
-              </a:rPr>
-              <a:t>RESEARCH</a:t>
             </a:r>
           </a:p>
         </p:txBody>
@@ -11001,11 +10297,11 @@
               </a:spcAft>
             </a:pPr>
             <a:r>
-              <a:rPr sz="3000" b="1" i="0">
+              <a:rPr sz="3000" b="0" i="0">
                 <a:solidFill>
                   <a:srgbClr val="2F2A36"/>
                 </a:solidFill>
-                <a:latin typeface="Libre Caslon Display"/>
+                <a:latin typeface="Georgia"/>
               </a:rPr>
               <a:t>Why four weeks?</a:t>
             </a:r>
@@ -11095,7 +10391,7 @@
                 <a:solidFill>
                   <a:srgbClr val="502961"/>
                 </a:solidFill>
-                <a:latin typeface="Karla"/>
+                <a:latin typeface="Calibri"/>
               </a:rPr>
               <a:t>21 trials of movement programmes, 2,441 young people, average age fourteen.</a:t>
             </a:r>
@@ -11225,11 +10521,11 @@
               </a:spcAft>
             </a:pPr>
             <a:r>
-              <a:rPr sz="1150" b="1" i="0">
+              <a:rPr sz="1150" b="0" i="0">
                 <a:solidFill>
                   <a:srgbClr val="FFFDF7"/>
                 </a:solidFill>
-                <a:latin typeface="Libre Caslon Display"/>
+                <a:latin typeface="Georgia"/>
               </a:rPr>
               <a:t>1</a:t>
             </a:r>
@@ -11271,7 +10567,7 @@
                 <a:solidFill>
                   <a:srgbClr val="2F2A36"/>
                 </a:solidFill>
-                <a:latin typeface="Karla"/>
+                <a:latin typeface="Calibri"/>
               </a:rPr>
               <a:t>While the programmes ran, low mood came down against the groups doing nothing.</a:t>
             </a:r>
@@ -11401,11 +10697,11 @@
               </a:spcAft>
             </a:pPr>
             <a:r>
-              <a:rPr sz="1150" b="1" i="0">
+              <a:rPr sz="1150" b="0" i="0">
                 <a:solidFill>
                   <a:srgbClr val="FFFDF7"/>
                 </a:solidFill>
-                <a:latin typeface="Libre Caslon Display"/>
+                <a:latin typeface="Georgia"/>
               </a:rPr>
               <a:t>2</a:t>
             </a:r>
@@ -11447,7 +10743,7 @@
                 <a:solidFill>
                   <a:srgbClr val="2F2A36"/>
                 </a:solidFill>
-                <a:latin typeface="Karla"/>
+                <a:latin typeface="Calibri"/>
               </a:rPr>
               <a:t>The effect was larger for the students aged thirteen and over than for younger children.</a:t>
             </a:r>
@@ -11577,11 +10873,11 @@
               </a:spcAft>
             </a:pPr>
             <a:r>
-              <a:rPr sz="1150" b="1" i="0">
+              <a:rPr sz="1150" b="0" i="0">
                 <a:solidFill>
                   <a:srgbClr val="FFFDF7"/>
                 </a:solidFill>
-                <a:latin typeface="Libre Caslon Display"/>
+                <a:latin typeface="Georgia"/>
               </a:rPr>
               <a:t>3</a:t>
             </a:r>
@@ -11623,7 +10919,7 @@
                 <a:solidFill>
                   <a:srgbClr val="2F2A36"/>
                 </a:solidFill>
-                <a:latin typeface="Karla"/>
+                <a:latin typeface="Calibri"/>
               </a:rPr>
               <a:t>Months after the programmes stopped, the difference between the groups had gone.</a:t>
             </a:r>
@@ -11665,7 +10961,7 @@
                 <a:solidFill>
                   <a:srgbClr val="502961"/>
                 </a:solidFill>
-                <a:latin typeface="Karla"/>
+                <a:latin typeface="Calibri"/>
               </a:rPr>
               <a:t>It helps while you are doing it, so you need a plan, not one good week.</a:t>
             </a:r>
@@ -11707,7 +11003,7 @@
                 <a:solidFill>
                   <a:srgbClr val="9C95A3"/>
                 </a:solidFill>
-                <a:latin typeface="Karla"/>
+                <a:latin typeface="Calibri"/>
               </a:rPr>
               <a:t>Recchia, F., Bernal, J. D. K., Fong, D. Y. et al. (2023). JAMA Pediatrics, 177(2), 132–140.</a:t>
             </a:r>
@@ -11773,7 +11069,7 @@
                 <a:solidFill>
                   <a:srgbClr val="9C95A3"/>
                 </a:solidFill>
-                <a:latin typeface="Karla"/>
+                <a:latin typeface="Calibri"/>
               </a:rPr>
               <a:t>The Pastoral Guide</a:t>
             </a:r>
@@ -11815,7 +11111,7 @@
                 <a:solidFill>
                   <a:srgbClr val="9C95A3"/>
                 </a:solidFill>
-                <a:latin typeface="Karla"/>
+                <a:latin typeface="Calibri"/>
               </a:rPr>
               <a:t>4 / 17</a:t>
             </a:r>
@@ -11919,97 +11215,9 @@
                 <a:solidFill>
                   <a:srgbClr val="D8BCE4"/>
                 </a:solidFill>
-                <a:latin typeface="Karla"/>
+                <a:latin typeface="Calibri"/>
               </a:rPr>
               <a:t>WRITE THESE DOWN</a:t>
-            </a:r>
-          </a:p>
-        </p:txBody>
-      </p:sp>
-      <p:sp>
-        <p:nvSpPr>
-          <p:cNvPr id="4" name="Rounded Rectangle 3"/>
-          <p:cNvSpPr/>
-          <p:nvPr/>
-        </p:nvSpPr>
-        <p:spPr>
-          <a:xfrm>
-            <a:off x="7086600" y="530352"/>
-            <a:ext cx="1371600" cy="347472"/>
-          </a:xfrm>
-          <a:prstGeom prst="roundRect">
-            <a:avLst>
-              <a:gd name="adj" fmla="val 50000"/>
-            </a:avLst>
-          </a:prstGeom>
-          <a:solidFill>
-            <a:srgbClr val="FFFDF7"/>
-          </a:solidFill>
-          <a:ln>
-            <a:noFill/>
-          </a:ln>
-          <a:effectLst/>
-        </p:spPr>
-        <p:style>
-          <a:lnRef idx="1">
-            <a:schemeClr val="accent1"/>
-          </a:lnRef>
-          <a:fillRef idx="3">
-            <a:schemeClr val="accent1"/>
-          </a:fillRef>
-          <a:effectRef idx="2">
-            <a:schemeClr val="accent1"/>
-          </a:effectRef>
-          <a:fontRef idx="minor">
-            <a:schemeClr val="lt1"/>
-          </a:fontRef>
-        </p:style>
-        <p:txBody>
-          <a:bodyPr rtlCol="0" anchor="ctr"/>
-          <a:lstStyle/>
-          <a:p>
-            <a:pPr algn="ctr"/>
-          </a:p>
-        </p:txBody>
-      </p:sp>
-      <p:sp>
-        <p:nvSpPr>
-          <p:cNvPr id="5" name="TextBox 4"/>
-          <p:cNvSpPr txBox="1"/>
-          <p:nvPr/>
-        </p:nvSpPr>
-        <p:spPr>
-          <a:xfrm>
-            <a:off x="7086600" y="589788"/>
-            <a:ext cx="1371600" cy="237744"/>
-          </a:xfrm>
-          <a:prstGeom prst="rect">
-            <a:avLst/>
-          </a:prstGeom>
-          <a:noFill/>
-        </p:spPr>
-        <p:txBody>
-          <a:bodyPr wrap="square" lIns="0" rIns="0" tIns="0" bIns="0" anchor="t">
-            <a:spAutoFit/>
-          </a:bodyPr>
-          <a:lstStyle/>
-          <a:p>
-            <a:pPr algn="ctr">
-              <a:lnSpc>
-                <a:spcPct val="125000"/>
-              </a:lnSpc>
-              <a:spcAft>
-                <a:spcPts val="0"/>
-              </a:spcAft>
-            </a:pPr>
-            <a:r>
-              <a:rPr sz="1000" b="1" i="0" spc="100">
-                <a:solidFill>
-                  <a:srgbClr val="502961"/>
-                </a:solidFill>
-                <a:latin typeface="Karla"/>
-              </a:rPr>
-              <a:t>LEARN</a:t>
             </a:r>
           </a:p>
         </p:txBody>
@@ -12045,11 +11253,11 @@
               </a:spcAft>
             </a:pPr>
             <a:r>
-              <a:rPr sz="3100" b="1" i="0">
+              <a:rPr sz="3100" b="0" i="0">
                 <a:solidFill>
                   <a:srgbClr val="FFFDF7"/>
                 </a:solidFill>
-                <a:latin typeface="Libre Caslon Display"/>
+                <a:latin typeface="Georgia"/>
               </a:rPr>
               <a:t>Four tests for a plan</a:t>
             </a:r>
@@ -12179,11 +11387,11 @@
               </a:spcAft>
             </a:pPr>
             <a:r>
-              <a:rPr sz="1300" b="1" i="0">
+              <a:rPr sz="1300" b="0" i="0">
                 <a:solidFill>
                   <a:srgbClr val="FFFDF7"/>
                 </a:solidFill>
-                <a:latin typeface="Libre Caslon Display"/>
+                <a:latin typeface="Georgia"/>
               </a:rPr>
               <a:t>1</a:t>
             </a:r>
@@ -12221,11 +11429,11 @@
               </a:spcAft>
             </a:pPr>
             <a:r>
-              <a:rPr sz="1500" b="1" i="0">
+              <a:rPr sz="1500" b="0" i="0">
                 <a:solidFill>
                   <a:srgbClr val="502961"/>
                 </a:solidFill>
-                <a:latin typeface="Libre Caslon Display"/>
+                <a:latin typeface="Georgia"/>
               </a:rPr>
               <a:t>Small enough</a:t>
             </a:r>
@@ -12267,7 +11475,7 @@
                 <a:solidFill>
                   <a:srgbClr val="635C6B"/>
                 </a:solidFill>
-                <a:latin typeface="Karla"/>
+                <a:latin typeface="Calibri"/>
               </a:rPr>
               <a:t>Under ten minutes. If it needs more, it will not happen on a bad day.</a:t>
             </a:r>
@@ -12397,11 +11605,11 @@
               </a:spcAft>
             </a:pPr>
             <a:r>
-              <a:rPr sz="1300" b="1" i="0">
+              <a:rPr sz="1300" b="0" i="0">
                 <a:solidFill>
                   <a:srgbClr val="FFFDF7"/>
                 </a:solidFill>
-                <a:latin typeface="Libre Caslon Display"/>
+                <a:latin typeface="Georgia"/>
               </a:rPr>
               <a:t>2</a:t>
             </a:r>
@@ -12439,11 +11647,11 @@
               </a:spcAft>
             </a:pPr>
             <a:r>
-              <a:rPr sz="1500" b="1" i="0">
+              <a:rPr sz="1500" b="0" i="0">
                 <a:solidFill>
                   <a:srgbClr val="502961"/>
                 </a:solidFill>
-                <a:latin typeface="Libre Caslon Display"/>
+                <a:latin typeface="Georgia"/>
               </a:rPr>
               <a:t>Attached to something</a:t>
             </a:r>
@@ -12485,7 +11693,7 @@
                 <a:solidFill>
                   <a:srgbClr val="635C6B"/>
                 </a:solidFill>
-                <a:latin typeface="Karla"/>
+                <a:latin typeface="Calibri"/>
               </a:rPr>
               <a:t>It follows something you already do, so you do not have to remember it.</a:t>
             </a:r>
@@ -12615,11 +11823,11 @@
               </a:spcAft>
             </a:pPr>
             <a:r>
-              <a:rPr sz="1300" b="1" i="0">
+              <a:rPr sz="1300" b="0" i="0">
                 <a:solidFill>
                   <a:srgbClr val="FFFDF7"/>
                 </a:solidFill>
-                <a:latin typeface="Libre Caslon Display"/>
+                <a:latin typeface="Georgia"/>
               </a:rPr>
               <a:t>3</a:t>
             </a:r>
@@ -12657,11 +11865,11 @@
               </a:spcAft>
             </a:pPr>
             <a:r>
-              <a:rPr sz="1500" b="1" i="0">
+              <a:rPr sz="1500" b="0" i="0">
                 <a:solidFill>
                   <a:srgbClr val="502961"/>
                 </a:solidFill>
-                <a:latin typeface="Libre Caslon Display"/>
+                <a:latin typeface="Georgia"/>
               </a:rPr>
               <a:t>Nothing to get</a:t>
             </a:r>
@@ -12703,7 +11911,7 @@
                 <a:solidFill>
                   <a:srgbClr val="635C6B"/>
                 </a:solidFill>
-                <a:latin typeface="Karla"/>
+                <a:latin typeface="Calibri"/>
               </a:rPr>
               <a:t>No kit to buy, nowhere to travel to, nobody else needed.</a:t>
             </a:r>
@@ -12833,11 +12041,11 @@
               </a:spcAft>
             </a:pPr>
             <a:r>
-              <a:rPr sz="1300" b="1" i="0">
+              <a:rPr sz="1300" b="0" i="0">
                 <a:solidFill>
                   <a:srgbClr val="FFFDF7"/>
                 </a:solidFill>
-                <a:latin typeface="Libre Caslon Display"/>
+                <a:latin typeface="Georgia"/>
               </a:rPr>
               <a:t>4</a:t>
             </a:r>
@@ -12875,11 +12083,11 @@
               </a:spcAft>
             </a:pPr>
             <a:r>
-              <a:rPr sz="1500" b="1" i="0">
+              <a:rPr sz="1500" b="0" i="0">
                 <a:solidFill>
                   <a:srgbClr val="502961"/>
                 </a:solidFill>
-                <a:latin typeface="Libre Caslon Display"/>
+                <a:latin typeface="Georgia"/>
               </a:rPr>
               <a:t>Works on a bad day</a:t>
             </a:r>
@@ -12921,7 +12129,7 @@
                 <a:solidFill>
                   <a:srgbClr val="635C6B"/>
                 </a:solidFill>
-                <a:latin typeface="Karla"/>
+                <a:latin typeface="Calibri"/>
               </a:rPr>
               <a:t>You would still do it when you feel like doing nothing at all.</a:t>
             </a:r>
@@ -12963,7 +12171,7 @@
                 <a:solidFill>
                   <a:srgbClr val="FFFDF7"/>
                 </a:solidFill>
-                <a:latin typeface="Karla"/>
+                <a:latin typeface="Calibri"/>
               </a:rPr>
               <a:t>A plan that fails one of these tends to stop in week two.</a:t>
             </a:r>
@@ -13029,7 +12237,7 @@
                 <a:solidFill>
                   <a:srgbClr val="D8BCE4"/>
                 </a:solidFill>
-                <a:latin typeface="Karla"/>
+                <a:latin typeface="Calibri"/>
               </a:rPr>
               <a:t>The Pastoral Guide</a:t>
             </a:r>
@@ -13071,7 +12279,7 @@
                 <a:solidFill>
                   <a:srgbClr val="D8BCE4"/>
                 </a:solidFill>
-                <a:latin typeface="Karla"/>
+                <a:latin typeface="Calibri"/>
               </a:rPr>
               <a:t>5 / 17</a:t>
             </a:r>
@@ -13175,97 +12383,9 @@
                 <a:solidFill>
                   <a:srgbClr val="502961"/>
                 </a:solidFill>
-                <a:latin typeface="Karla"/>
+                <a:latin typeface="Calibri"/>
               </a:rPr>
               <a:t>MARK ONE TOGETHER FIRST</a:t>
-            </a:r>
-          </a:p>
-        </p:txBody>
-      </p:sp>
-      <p:sp>
-        <p:nvSpPr>
-          <p:cNvPr id="4" name="Rounded Rectangle 3"/>
-          <p:cNvSpPr/>
-          <p:nvPr/>
-        </p:nvSpPr>
-        <p:spPr>
-          <a:xfrm>
-            <a:off x="7086600" y="530352"/>
-            <a:ext cx="1371600" cy="347472"/>
-          </a:xfrm>
-          <a:prstGeom prst="roundRect">
-            <a:avLst>
-              <a:gd name="adj" fmla="val 50000"/>
-            </a:avLst>
-          </a:prstGeom>
-          <a:solidFill>
-            <a:srgbClr val="F0E4F5"/>
-          </a:solidFill>
-          <a:ln>
-            <a:noFill/>
-          </a:ln>
-          <a:effectLst/>
-        </p:spPr>
-        <p:style>
-          <a:lnRef idx="1">
-            <a:schemeClr val="accent1"/>
-          </a:lnRef>
-          <a:fillRef idx="3">
-            <a:schemeClr val="accent1"/>
-          </a:fillRef>
-          <a:effectRef idx="2">
-            <a:schemeClr val="accent1"/>
-          </a:effectRef>
-          <a:fontRef idx="minor">
-            <a:schemeClr val="lt1"/>
-          </a:fontRef>
-        </p:style>
-        <p:txBody>
-          <a:bodyPr rtlCol="0" anchor="ctr"/>
-          <a:lstStyle/>
-          <a:p>
-            <a:pPr algn="ctr"/>
-          </a:p>
-        </p:txBody>
-      </p:sp>
-      <p:sp>
-        <p:nvSpPr>
-          <p:cNvPr id="5" name="TextBox 4"/>
-          <p:cNvSpPr txBox="1"/>
-          <p:nvPr/>
-        </p:nvSpPr>
-        <p:spPr>
-          <a:xfrm>
-            <a:off x="7086600" y="589788"/>
-            <a:ext cx="1371600" cy="237744"/>
-          </a:xfrm>
-          <a:prstGeom prst="rect">
-            <a:avLst/>
-          </a:prstGeom>
-          <a:noFill/>
-        </p:spPr>
-        <p:txBody>
-          <a:bodyPr wrap="square" lIns="0" rIns="0" tIns="0" bIns="0" anchor="t">
-            <a:spAutoFit/>
-          </a:bodyPr>
-          <a:lstStyle/>
-          <a:p>
-            <a:pPr algn="ctr">
-              <a:lnSpc>
-                <a:spcPct val="125000"/>
-              </a:lnSpc>
-              <a:spcAft>
-                <a:spcPts val="0"/>
-              </a:spcAft>
-            </a:pPr>
-            <a:r>
-              <a:rPr sz="1000" b="1" i="0" spc="100">
-                <a:solidFill>
-                  <a:srgbClr val="502961"/>
-                </a:solidFill>
-                <a:latin typeface="Karla"/>
-              </a:rPr>
-              <a:t>MODEL</a:t>
             </a:r>
           </a:p>
         </p:txBody>
@@ -13301,11 +12421,11 @@
               </a:spcAft>
             </a:pPr>
             <a:r>
-              <a:rPr sz="3200" b="1" i="0">
+              <a:rPr sz="3200" b="0" i="0">
                 <a:solidFill>
                   <a:srgbClr val="2F2A36"/>
                 </a:solidFill>
-                <a:latin typeface="Libre Caslon Display"/>
+                <a:latin typeface="Georgia"/>
               </a:rPr>
               <a:t>Try it on this one</a:t>
             </a:r>
@@ -13391,11 +12511,11 @@
               </a:spcAft>
             </a:pPr>
             <a:r>
-              <a:rPr sz="1500" b="1" i="0">
+              <a:rPr sz="1500" b="0" i="0">
                 <a:solidFill>
                   <a:srgbClr val="502961"/>
                 </a:solidFill>
-                <a:latin typeface="Libre Caslon Display"/>
+                <a:latin typeface="Georgia"/>
               </a:rPr>
               <a:t>“Run five kilometres every morning before school.”</a:t>
             </a:r>
@@ -13481,11 +12601,11 @@
               </a:spcAft>
             </a:pPr>
             <a:r>
-              <a:rPr sz="1200" b="1" i="0">
+              <a:rPr sz="1200" b="0" i="0">
                 <a:solidFill>
                   <a:srgbClr val="502961"/>
                 </a:solidFill>
-                <a:latin typeface="Libre Caslon Display"/>
+                <a:latin typeface="Georgia"/>
               </a:rPr>
               <a:t>Small enough?</a:t>
             </a:r>
@@ -13527,7 +12647,7 @@
                 <a:solidFill>
                   <a:srgbClr val="635C6B"/>
                 </a:solidFill>
-                <a:latin typeface="Karla"/>
+                <a:latin typeface="Calibri"/>
               </a:rPr>
               <a:t>Forty minutes, on a school morning. No.</a:t>
             </a:r>
@@ -13613,11 +12733,11 @@
               </a:spcAft>
             </a:pPr>
             <a:r>
-              <a:rPr sz="1200" b="1" i="0">
+              <a:rPr sz="1200" b="0" i="0">
                 <a:solidFill>
                   <a:srgbClr val="502961"/>
                 </a:solidFill>
-                <a:latin typeface="Libre Caslon Display"/>
+                <a:latin typeface="Georgia"/>
               </a:rPr>
               <a:t>Attached to something?</a:t>
             </a:r>
@@ -13659,7 +12779,7 @@
                 <a:solidFill>
                   <a:srgbClr val="635C6B"/>
                 </a:solidFill>
-                <a:latin typeface="Karla"/>
+                <a:latin typeface="Calibri"/>
               </a:rPr>
               <a:t>It is attached to getting up an hour earlier.</a:t>
             </a:r>
@@ -13745,11 +12865,11 @@
               </a:spcAft>
             </a:pPr>
             <a:r>
-              <a:rPr sz="1200" b="1" i="0">
+              <a:rPr sz="1200" b="0" i="0">
                 <a:solidFill>
                   <a:srgbClr val="502961"/>
                 </a:solidFill>
-                <a:latin typeface="Libre Caslon Display"/>
+                <a:latin typeface="Georgia"/>
               </a:rPr>
               <a:t>Nothing to get?</a:t>
             </a:r>
@@ -13791,7 +12911,7 @@
                 <a:solidFill>
                   <a:srgbClr val="635C6B"/>
                 </a:solidFill>
-                <a:latin typeface="Karla"/>
+                <a:latin typeface="Calibri"/>
               </a:rPr>
               <a:t>Trainers, a safe route, and daylight when you get up.</a:t>
             </a:r>
@@ -13877,11 +12997,11 @@
               </a:spcAft>
             </a:pPr>
             <a:r>
-              <a:rPr sz="1200" b="1" i="0">
+              <a:rPr sz="1200" b="0" i="0">
                 <a:solidFill>
                   <a:srgbClr val="502961"/>
                 </a:solidFill>
-                <a:latin typeface="Libre Caslon Display"/>
+                <a:latin typeface="Georgia"/>
               </a:rPr>
               <a:t>Works on a bad day?</a:t>
             </a:r>
@@ -13923,7 +13043,7 @@
                 <a:solidFill>
                   <a:srgbClr val="635C6B"/>
                 </a:solidFill>
-                <a:latin typeface="Karla"/>
+                <a:latin typeface="Calibri"/>
               </a:rPr>
               <a:t>This is the first thing to go, and it never comes back.</a:t>
             </a:r>
@@ -13965,7 +13085,7 @@
                 <a:solidFill>
                   <a:srgbClr val="502961"/>
                 </a:solidFill>
-                <a:latin typeface="Karla"/>
+                <a:latin typeface="Calibri"/>
               </a:rPr>
               <a:t>One change passes all four: wall press-ups, right after you brush your teeth.</a:t>
             </a:r>
@@ -14031,7 +13151,7 @@
                 <a:solidFill>
                   <a:srgbClr val="9C95A3"/>
                 </a:solidFill>
-                <a:latin typeface="Karla"/>
+                <a:latin typeface="Calibri"/>
               </a:rPr>
               <a:t>The Pastoral Guide</a:t>
             </a:r>
@@ -14073,7 +13193,7 @@
                 <a:solidFill>
                   <a:srgbClr val="9C95A3"/>
                 </a:solidFill>
-                <a:latin typeface="Karla"/>
+                <a:latin typeface="Calibri"/>
               </a:rPr>
               <a:t>6 / 17</a:t>
             </a:r>
@@ -14177,97 +13297,9 @@
                 <a:solidFill>
                   <a:srgbClr val="502961"/>
                 </a:solidFill>
-                <a:latin typeface="Karla"/>
+                <a:latin typeface="Calibri"/>
               </a:rPr>
               <a:t>BEFORE YOU WRITE ANYTHING</a:t>
-            </a:r>
-          </a:p>
-        </p:txBody>
-      </p:sp>
-      <p:sp>
-        <p:nvSpPr>
-          <p:cNvPr id="4" name="Rounded Rectangle 3"/>
-          <p:cNvSpPr/>
-          <p:nvPr/>
-        </p:nvSpPr>
-        <p:spPr>
-          <a:xfrm>
-            <a:off x="7086600" y="530352"/>
-            <a:ext cx="1371600" cy="347472"/>
-          </a:xfrm>
-          <a:prstGeom prst="roundRect">
-            <a:avLst>
-              <a:gd name="adj" fmla="val 50000"/>
-            </a:avLst>
-          </a:prstGeom>
-          <a:solidFill>
-            <a:srgbClr val="F0E4F5"/>
-          </a:solidFill>
-          <a:ln>
-            <a:noFill/>
-          </a:ln>
-          <a:effectLst/>
-        </p:spPr>
-        <p:style>
-          <a:lnRef idx="1">
-            <a:schemeClr val="accent1"/>
-          </a:lnRef>
-          <a:fillRef idx="3">
-            <a:schemeClr val="accent1"/>
-          </a:fillRef>
-          <a:effectRef idx="2">
-            <a:schemeClr val="accent1"/>
-          </a:effectRef>
-          <a:fontRef idx="minor">
-            <a:schemeClr val="lt1"/>
-          </a:fontRef>
-        </p:style>
-        <p:txBody>
-          <a:bodyPr rtlCol="0" anchor="ctr"/>
-          <a:lstStyle/>
-          <a:p>
-            <a:pPr algn="ctr"/>
-          </a:p>
-        </p:txBody>
-      </p:sp>
-      <p:sp>
-        <p:nvSpPr>
-          <p:cNvPr id="5" name="TextBox 4"/>
-          <p:cNvSpPr txBox="1"/>
-          <p:nvPr/>
-        </p:nvSpPr>
-        <p:spPr>
-          <a:xfrm>
-            <a:off x="7086600" y="589788"/>
-            <a:ext cx="1371600" cy="237744"/>
-          </a:xfrm>
-          <a:prstGeom prst="rect">
-            <a:avLst/>
-          </a:prstGeom>
-          <a:noFill/>
-        </p:spPr>
-        <p:txBody>
-          <a:bodyPr wrap="square" lIns="0" rIns="0" tIns="0" bIns="0" anchor="t">
-            <a:spAutoFit/>
-          </a:bodyPr>
-          <a:lstStyle/>
-          <a:p>
-            <a:pPr algn="ctr">
-              <a:lnSpc>
-                <a:spcPct val="125000"/>
-              </a:lnSpc>
-              <a:spcAft>
-                <a:spcPts val="0"/>
-              </a:spcAft>
-            </a:pPr>
-            <a:r>
-              <a:rPr sz="1000" b="1" i="0" spc="100">
-                <a:solidFill>
-                  <a:srgbClr val="502961"/>
-                </a:solidFill>
-                <a:latin typeface="Karla"/>
-              </a:rPr>
-              <a:t>LEARN</a:t>
             </a:r>
           </a:p>
         </p:txBody>
@@ -14303,11 +13335,11 @@
               </a:spcAft>
             </a:pPr>
             <a:r>
-              <a:rPr sz="3000" b="1" i="0">
+              <a:rPr sz="3000" b="0" i="0">
                 <a:solidFill>
                   <a:srgbClr val="2F2A36"/>
                 </a:solidFill>
-                <a:latin typeface="Libre Caslon Display"/>
+                <a:latin typeface="Georgia"/>
               </a:rPr>
               <a:t>What growing slowly means</a:t>
             </a:r>
@@ -14349,7 +13381,7 @@
                 <a:solidFill>
                   <a:srgbClr val="635C6B"/>
                 </a:solidFill>
-                <a:latin typeface="Karla"/>
+                <a:latin typeface="Calibri"/>
               </a:rPr>
               <a:t>Four weeks, and week four is still not impressive. That is deliberate.</a:t>
             </a:r>
@@ -14439,7 +13471,7 @@
                 <a:solidFill>
                   <a:srgbClr val="635C6B"/>
                 </a:solidFill>
-                <a:latin typeface="Karla"/>
+                <a:latin typeface="Calibri"/>
               </a:rPr>
               <a:t>Week 1</a:t>
             </a:r>
@@ -14477,11 +13509,11 @@
               </a:spcAft>
             </a:pPr>
             <a:r>
-              <a:rPr sz="1400" b="1" i="0">
+              <a:rPr sz="1400" b="0" i="0">
                 <a:solidFill>
                   <a:srgbClr val="502961"/>
                 </a:solidFill>
-                <a:latin typeface="Libre Caslon Display"/>
+                <a:latin typeface="Georgia"/>
               </a:rPr>
               <a:t>Two minutes</a:t>
             </a:r>
@@ -14571,7 +13603,7 @@
                 <a:solidFill>
                   <a:srgbClr val="635C6B"/>
                 </a:solidFill>
-                <a:latin typeface="Karla"/>
+                <a:latin typeface="Calibri"/>
               </a:rPr>
               <a:t>Week 2</a:t>
             </a:r>
@@ -14609,11 +13641,11 @@
               </a:spcAft>
             </a:pPr>
             <a:r>
-              <a:rPr sz="1400" b="1" i="0">
+              <a:rPr sz="1400" b="0" i="0">
                 <a:solidFill>
                   <a:srgbClr val="502961"/>
                 </a:solidFill>
-                <a:latin typeface="Libre Caslon Display"/>
+                <a:latin typeface="Georgia"/>
               </a:rPr>
               <a:t>Three minutes</a:t>
             </a:r>
@@ -14703,7 +13735,7 @@
                 <a:solidFill>
                   <a:srgbClr val="635C6B"/>
                 </a:solidFill>
-                <a:latin typeface="Karla"/>
+                <a:latin typeface="Calibri"/>
               </a:rPr>
               <a:t>Week 3</a:t>
             </a:r>
@@ -14741,11 +13773,11 @@
               </a:spcAft>
             </a:pPr>
             <a:r>
-              <a:rPr sz="1400" b="1" i="0">
+              <a:rPr sz="1400" b="0" i="0">
                 <a:solidFill>
                   <a:srgbClr val="502961"/>
                 </a:solidFill>
-                <a:latin typeface="Libre Caslon Display"/>
+                <a:latin typeface="Georgia"/>
               </a:rPr>
               <a:t>Four minutes</a:t>
             </a:r>
@@ -14835,7 +13867,7 @@
                 <a:solidFill>
                   <a:srgbClr val="635C6B"/>
                 </a:solidFill>
-                <a:latin typeface="Karla"/>
+                <a:latin typeface="Calibri"/>
               </a:rPr>
               <a:t>Week 4</a:t>
             </a:r>
@@ -14873,11 +13905,11 @@
               </a:spcAft>
             </a:pPr>
             <a:r>
-              <a:rPr sz="1400" b="1" i="0">
+              <a:rPr sz="1400" b="0" i="0">
                 <a:solidFill>
                   <a:srgbClr val="502961"/>
                 </a:solidFill>
-                <a:latin typeface="Libre Caslon Display"/>
+                <a:latin typeface="Georgia"/>
               </a:rPr>
               <a:t>Five minutes</a:t>
             </a:r>
@@ -14967,7 +13999,7 @@
                 <a:solidFill>
                   <a:srgbClr val="502961"/>
                 </a:solidFill>
-                <a:latin typeface="Karla"/>
+                <a:latin typeface="Calibri"/>
               </a:rPr>
               <a:t>Doubling it every week is how plans fall apart. Add a minute, or one more day.</a:t>
             </a:r>
@@ -15009,7 +14041,7 @@
                 <a:solidFill>
                   <a:srgbClr val="502961"/>
                 </a:solidFill>
-                <a:latin typeface="Karla"/>
+                <a:latin typeface="Calibri"/>
               </a:rPr>
               <a:t>If week one already feels like an effort, it is too big. Halve it and start again.</a:t>
             </a:r>
@@ -15075,7 +14107,7 @@
                 <a:solidFill>
                   <a:srgbClr val="9C95A3"/>
                 </a:solidFill>
-                <a:latin typeface="Karla"/>
+                <a:latin typeface="Calibri"/>
               </a:rPr>
               <a:t>The Pastoral Guide</a:t>
             </a:r>
@@ -15117,7 +14149,7 @@
                 <a:solidFill>
                   <a:srgbClr val="9C95A3"/>
                 </a:solidFill>
-                <a:latin typeface="Karla"/>
+                <a:latin typeface="Calibri"/>
               </a:rPr>
               <a:t>7 / 17</a:t>
             </a:r>
@@ -15221,97 +14253,9 @@
                 <a:solidFill>
                   <a:srgbClr val="502961"/>
                 </a:solidFill>
-                <a:latin typeface="Karla"/>
+                <a:latin typeface="Calibri"/>
               </a:rPr>
               <a:t>ON THE CARD</a:t>
-            </a:r>
-          </a:p>
-        </p:txBody>
-      </p:sp>
-      <p:sp>
-        <p:nvSpPr>
-          <p:cNvPr id="4" name="Rounded Rectangle 3"/>
-          <p:cNvSpPr/>
-          <p:nvPr/>
-        </p:nvSpPr>
-        <p:spPr>
-          <a:xfrm>
-            <a:off x="6967728" y="530352"/>
-            <a:ext cx="1490472" cy="347472"/>
-          </a:xfrm>
-          <a:prstGeom prst="roundRect">
-            <a:avLst>
-              <a:gd name="adj" fmla="val 50000"/>
-            </a:avLst>
-          </a:prstGeom>
-          <a:solidFill>
-            <a:srgbClr val="F0E4F5"/>
-          </a:solidFill>
-          <a:ln>
-            <a:noFill/>
-          </a:ln>
-          <a:effectLst/>
-        </p:spPr>
-        <p:style>
-          <a:lnRef idx="1">
-            <a:schemeClr val="accent1"/>
-          </a:lnRef>
-          <a:fillRef idx="3">
-            <a:schemeClr val="accent1"/>
-          </a:fillRef>
-          <a:effectRef idx="2">
-            <a:schemeClr val="accent1"/>
-          </a:effectRef>
-          <a:fontRef idx="minor">
-            <a:schemeClr val="lt1"/>
-          </a:fontRef>
-        </p:style>
-        <p:txBody>
-          <a:bodyPr rtlCol="0" anchor="ctr"/>
-          <a:lstStyle/>
-          <a:p>
-            <a:pPr algn="ctr"/>
-          </a:p>
-        </p:txBody>
-      </p:sp>
-      <p:sp>
-        <p:nvSpPr>
-          <p:cNvPr id="5" name="TextBox 4"/>
-          <p:cNvSpPr txBox="1"/>
-          <p:nvPr/>
-        </p:nvSpPr>
-        <p:spPr>
-          <a:xfrm>
-            <a:off x="6967728" y="589788"/>
-            <a:ext cx="1490472" cy="237744"/>
-          </a:xfrm>
-          <a:prstGeom prst="rect">
-            <a:avLst/>
-          </a:prstGeom>
-          <a:noFill/>
-        </p:spPr>
-        <p:txBody>
-          <a:bodyPr wrap="square" lIns="0" rIns="0" tIns="0" bIns="0" anchor="t">
-            <a:spAutoFit/>
-          </a:bodyPr>
-          <a:lstStyle/>
-          <a:p>
-            <a:pPr algn="ctr">
-              <a:lnSpc>
-                <a:spcPct val="125000"/>
-              </a:lnSpc>
-              <a:spcAft>
-                <a:spcPts val="0"/>
-              </a:spcAft>
-            </a:pPr>
-            <a:r>
-              <a:rPr sz="1000" b="1" i="0" spc="100">
-                <a:solidFill>
-                  <a:srgbClr val="502961"/>
-                </a:solidFill>
-                <a:latin typeface="Karla"/>
-              </a:rPr>
-              <a:t>YOUR TURN</a:t>
             </a:r>
           </a:p>
         </p:txBody>
@@ -15347,11 +14291,11 @@
               </a:spcAft>
             </a:pPr>
             <a:r>
-              <a:rPr sz="3200" b="1" i="0">
+              <a:rPr sz="3200" b="0" i="0">
                 <a:solidFill>
                   <a:srgbClr val="2F2A36"/>
                 </a:solidFill>
-                <a:latin typeface="Libre Caslon Display"/>
+                <a:latin typeface="Georgia"/>
               </a:rPr>
               <a:t>Write your four weeks</a:t>
             </a:r>
@@ -15393,7 +14337,7 @@
                 <a:solidFill>
                   <a:srgbClr val="635C6B"/>
                 </a:solidFill>
-                <a:latin typeface="Karla"/>
+                <a:latin typeface="Calibri"/>
               </a:rPr>
               <a:t>Name on it. Somebody who has never seen it is going to mark it shortly.</a:t>
             </a:r>
@@ -15479,11 +14423,11 @@
               </a:spcAft>
             </a:pPr>
             <a:r>
-              <a:rPr sz="1250" b="1" i="0">
+              <a:rPr sz="1250" b="0" i="0">
                 <a:solidFill>
                   <a:srgbClr val="502961"/>
                 </a:solidFill>
-                <a:latin typeface="Libre Caslon Display"/>
+                <a:latin typeface="Georgia"/>
               </a:rPr>
               <a:t>What it is</a:t>
             </a:r>
@@ -15525,7 +14469,7 @@
                 <a:solidFill>
                   <a:srgbClr val="635C6B"/>
                 </a:solidFill>
-                <a:latin typeface="Karla"/>
+                <a:latin typeface="Calibri"/>
               </a:rPr>
               <a:t>One thing. Press-ups, a walk, stretching, dancing in your room.</a:t>
             </a:r>
@@ -15611,11 +14555,11 @@
               </a:spcAft>
             </a:pPr>
             <a:r>
-              <a:rPr sz="1250" b="1" i="0">
+              <a:rPr sz="1250" b="0" i="0">
                 <a:solidFill>
                   <a:srgbClr val="502961"/>
                 </a:solidFill>
-                <a:latin typeface="Libre Caslon Display"/>
+                <a:latin typeface="Georgia"/>
               </a:rPr>
               <a:t>When exactly</a:t>
             </a:r>
@@ -15657,7 +14601,7 @@
                 <a:solidFill>
                   <a:srgbClr val="635C6B"/>
                 </a:solidFill>
-                <a:latin typeface="Karla"/>
+                <a:latin typeface="Calibri"/>
               </a:rPr>
               <a:t>Not “in the evening”. After what, on which days?</a:t>
             </a:r>
@@ -15743,11 +14687,11 @@
               </a:spcAft>
             </a:pPr>
             <a:r>
-              <a:rPr sz="1250" b="1" i="0">
+              <a:rPr sz="1250" b="0" i="0">
                 <a:solidFill>
                   <a:srgbClr val="502961"/>
                 </a:solidFill>
-                <a:latin typeface="Libre Caslon Display"/>
+                <a:latin typeface="Georgia"/>
               </a:rPr>
               <a:t>Week 1 to week 4</a:t>
             </a:r>
@@ -15789,7 +14733,7 @@
                 <a:solidFill>
                   <a:srgbClr val="635C6B"/>
                 </a:solidFill>
-                <a:latin typeface="Karla"/>
+                <a:latin typeface="Calibri"/>
               </a:rPr>
               <a:t>How it grows. Four numbers, and week one is tiny.</a:t>
             </a:r>
@@ -15875,11 +14819,11 @@
               </a:spcAft>
             </a:pPr>
             <a:r>
-              <a:rPr sz="1250" b="1" i="0">
+              <a:rPr sz="1250" b="0" i="0">
                 <a:solidFill>
                   <a:srgbClr val="502961"/>
                 </a:solidFill>
-                <a:latin typeface="Libre Caslon Display"/>
+                <a:latin typeface="Georgia"/>
               </a:rPr>
               <a:t>What would stop it</a:t>
             </a:r>
@@ -15921,7 +14865,7 @@
                 <a:solidFill>
                   <a:srgbClr val="635C6B"/>
                 </a:solidFill>
-                <a:latin typeface="Karla"/>
+                <a:latin typeface="Calibri"/>
               </a:rPr>
               <a:t>Name the real obstacle. You need it for the if-then sentence.</a:t>
             </a:r>
@@ -15963,7 +14907,7 @@
                 <a:solidFill>
                   <a:srgbClr val="502961"/>
                 </a:solidFill>
-                <a:latin typeface="Karla"/>
+                <a:latin typeface="Calibri"/>
               </a:rPr>
               <a:t>Check it against all four tests yourself before you hand it over.</a:t>
             </a:r>
@@ -16029,7 +14973,7 @@
                 <a:solidFill>
                   <a:srgbClr val="9C95A3"/>
                 </a:solidFill>
-                <a:latin typeface="Karla"/>
+                <a:latin typeface="Calibri"/>
               </a:rPr>
               <a:t>The Pastoral Guide</a:t>
             </a:r>
@@ -16071,7 +15015,7 @@
                 <a:solidFill>
                   <a:srgbClr val="9C95A3"/>
                 </a:solidFill>
-                <a:latin typeface="Karla"/>
+                <a:latin typeface="Calibri"/>
               </a:rPr>
               <a:t>8 / 17</a:t>
             </a:r>
@@ -16175,97 +15119,9 @@
                 <a:solidFill>
                   <a:srgbClr val="D8BCE4"/>
                 </a:solidFill>
-                <a:latin typeface="Karla"/>
+                <a:latin typeface="Calibri"/>
               </a:rPr>
               <a:t>PASS IT TWO TABLES ALONG</a:t>
-            </a:r>
-          </a:p>
-        </p:txBody>
-      </p:sp>
-      <p:sp>
-        <p:nvSpPr>
-          <p:cNvPr id="4" name="Rounded Rectangle 3"/>
-          <p:cNvSpPr/>
-          <p:nvPr/>
-        </p:nvSpPr>
-        <p:spPr>
-          <a:xfrm>
-            <a:off x="7086600" y="530352"/>
-            <a:ext cx="1371600" cy="347472"/>
-          </a:xfrm>
-          <a:prstGeom prst="roundRect">
-            <a:avLst>
-              <a:gd name="adj" fmla="val 50000"/>
-            </a:avLst>
-          </a:prstGeom>
-          <a:solidFill>
-            <a:srgbClr val="FFFDF7"/>
-          </a:solidFill>
-          <a:ln>
-            <a:noFill/>
-          </a:ln>
-          <a:effectLst/>
-        </p:spPr>
-        <p:style>
-          <a:lnRef idx="1">
-            <a:schemeClr val="accent1"/>
-          </a:lnRef>
-          <a:fillRef idx="3">
-            <a:schemeClr val="accent1"/>
-          </a:fillRef>
-          <a:effectRef idx="2">
-            <a:schemeClr val="accent1"/>
-          </a:effectRef>
-          <a:fontRef idx="minor">
-            <a:schemeClr val="lt1"/>
-          </a:fontRef>
-        </p:style>
-        <p:txBody>
-          <a:bodyPr rtlCol="0" anchor="ctr"/>
-          <a:lstStyle/>
-          <a:p>
-            <a:pPr algn="ctr"/>
-          </a:p>
-        </p:txBody>
-      </p:sp>
-      <p:sp>
-        <p:nvSpPr>
-          <p:cNvPr id="5" name="TextBox 4"/>
-          <p:cNvSpPr txBox="1"/>
-          <p:nvPr/>
-        </p:nvSpPr>
-        <p:spPr>
-          <a:xfrm>
-            <a:off x="7086600" y="589788"/>
-            <a:ext cx="1371600" cy="237744"/>
-          </a:xfrm>
-          <a:prstGeom prst="rect">
-            <a:avLst/>
-          </a:prstGeom>
-          <a:noFill/>
-        </p:spPr>
-        <p:txBody>
-          <a:bodyPr wrap="square" lIns="0" rIns="0" tIns="0" bIns="0" anchor="t">
-            <a:spAutoFit/>
-          </a:bodyPr>
-          <a:lstStyle/>
-          <a:p>
-            <a:pPr algn="ctr">
-              <a:lnSpc>
-                <a:spcPct val="125000"/>
-              </a:lnSpc>
-              <a:spcAft>
-                <a:spcPts val="0"/>
-              </a:spcAft>
-            </a:pPr>
-            <a:r>
-              <a:rPr sz="1000" b="1" i="0" spc="100">
-                <a:solidFill>
-                  <a:srgbClr val="502961"/>
-                </a:solidFill>
-                <a:latin typeface="Karla"/>
-              </a:rPr>
-              <a:t>SWAP</a:t>
             </a:r>
           </a:p>
         </p:txBody>
@@ -16301,11 +15157,11 @@
               </a:spcAft>
             </a:pPr>
             <a:r>
-              <a:rPr sz="3100" b="1" i="0">
+              <a:rPr sz="3100" b="0" i="0">
                 <a:solidFill>
                   <a:srgbClr val="FFFDF7"/>
                 </a:solidFill>
-                <a:latin typeface="Libre Caslon Display"/>
+                <a:latin typeface="Georgia"/>
               </a:rPr>
               <a:t>Mark it against the four</a:t>
             </a:r>
@@ -16435,11 +15291,11 @@
               </a:spcAft>
             </a:pPr>
             <a:r>
-              <a:rPr sz="1200" b="1" i="0">
+              <a:rPr sz="1200" b="0" i="0">
                 <a:solidFill>
                   <a:srgbClr val="FFFDF7"/>
                 </a:solidFill>
-                <a:latin typeface="Libre Caslon Display"/>
+                <a:latin typeface="Georgia"/>
               </a:rPr>
               <a:t>1</a:t>
             </a:r>
@@ -16481,7 +15337,7 @@
                 <a:solidFill>
                   <a:srgbClr val="502961"/>
                 </a:solidFill>
-                <a:latin typeface="Karla"/>
+                <a:latin typeface="Calibri"/>
               </a:rPr>
               <a:t>Tick each test the plan actually passes. Four ticks is rare.</a:t>
             </a:r>
@@ -16611,11 +15467,11 @@
               </a:spcAft>
             </a:pPr>
             <a:r>
-              <a:rPr sz="1200" b="1" i="0">
+              <a:rPr sz="1200" b="0" i="0">
                 <a:solidFill>
                   <a:srgbClr val="FFFDF7"/>
                 </a:solidFill>
-                <a:latin typeface="Libre Caslon Display"/>
+                <a:latin typeface="Georgia"/>
               </a:rPr>
               <a:t>2</a:t>
             </a:r>
@@ -16657,7 +15513,7 @@
                 <a:solidFill>
                   <a:srgbClr val="502961"/>
                 </a:solidFill>
-                <a:latin typeface="Karla"/>
+                <a:latin typeface="Calibri"/>
               </a:rPr>
               <a:t>Write the one change that would get it past the test it failed.</a:t>
             </a:r>
@@ -16787,11 +15643,11 @@
               </a:spcAft>
             </a:pPr>
             <a:r>
-              <a:rPr sz="1200" b="1" i="0">
+              <a:rPr sz="1200" b="0" i="0">
                 <a:solidFill>
                   <a:srgbClr val="FFFDF7"/>
                 </a:solidFill>
-                <a:latin typeface="Libre Caslon Display"/>
+                <a:latin typeface="Georgia"/>
               </a:rPr>
               <a:t>3</a:t>
             </a:r>
@@ -16833,7 +15689,7 @@
                 <a:solidFill>
                   <a:srgbClr val="502961"/>
                 </a:solidFill>
-                <a:latin typeface="Karla"/>
+                <a:latin typeface="Calibri"/>
               </a:rPr>
               <a:t>Then the honest question: would you do this plan?</a:t>
             </a:r>
@@ -16875,7 +15731,7 @@
                 <a:solidFill>
                   <a:srgbClr val="FFFDF7"/>
                 </a:solidFill>
-                <a:latin typeface="Karla"/>
+                <a:latin typeface="Calibri"/>
               </a:rPr>
               <a:t>Marking a plan is not judging the person. Say what you would change.</a:t>
             </a:r>
@@ -16941,7 +15797,7 @@
                 <a:solidFill>
                   <a:srgbClr val="D8BCE4"/>
                 </a:solidFill>
-                <a:latin typeface="Karla"/>
+                <a:latin typeface="Calibri"/>
               </a:rPr>
               <a:t>The Pastoral Guide</a:t>
             </a:r>
@@ -16983,7 +15839,7 @@
                 <a:solidFill>
                   <a:srgbClr val="D8BCE4"/>
                 </a:solidFill>
-                <a:latin typeface="Karla"/>
+                <a:latin typeface="Calibri"/>
               </a:rPr>
               <a:t>9 / 17</a:t>
             </a:r>

--- a/tutor-time/movement-and-mental-health/downloads/Movement_and_Mental_Health_Lesson_3.pptx
+++ b/tutor-time/movement-and-mental-health/downloads/Movement_and_Mental_Health_Lesson_3.pptx
@@ -3337,17 +3337,7 @@
                 </a:solidFill>
                 <a:latin typeface="Calibri"/>
               </a:rPr>
-              <a:t>Anyone can write a plan that would work.</a:t>
-            </a:r>
-            <a:br/>
-            <a:r>
-              <a:rPr sz="1500" b="0" i="0">
-                <a:solidFill>
-                  <a:srgbClr val="635C6B"/>
-                </a:solidFill>
-                <a:latin typeface="Calibri"/>
-              </a:rPr>
-              <a:t>The hard part is writing one you are still doing in four weeks.</a:t>
+              <a:t>Write a plan for moving more that you will still be doing in four weeks.</a:t>
             </a:r>
           </a:p>
         </p:txBody>
